--- a/docs/HCDW_Presentation.pptx
+++ b/docs/HCDW_Presentation.pptx
@@ -4,6 +4,9 @@
   <p:sldMasterIdLst>
     <p:sldMasterId id="2147483648" r:id="rId1"/>
   </p:sldMasterIdLst>
+  <p:notesMasterIdLst>
+    <p:notesMasterId r:id="rId18"/>
+  </p:notesMasterIdLst>
   <p:sldIdLst>
     <p:sldId id="256" r:id="rId2"/>
     <p:sldId id="257" r:id="rId3"/>
@@ -22,10 +25,7 @@
     <p:sldId id="270" r:id="rId16"/>
     <p:sldId id="271" r:id="rId17"/>
   </p:sldIdLst>
-  <p:notesMasterIdLst>
-    <p:notesMasterId r:id="rId18"/>
-  </p:notesMasterIdLst>
-  <p:sldSz cx="9144000" cy="5143500"/>
+  <p:sldSz cx="9144000" cy="5143500" type="screen16x9"/>
   <p:notesSz cx="5143500" cy="9144000"/>
   <p:defaultTextStyle>
     <a:lvl1pPr marL="0" algn="l" defTabSz="914400" rtl="0" eaLnBrk="1" latinLnBrk="0" hangingPunct="1">
@@ -119,13 +119,20 @@
       </a:defRPr>
     </a:lvl9pPr>
   </p:defaultTextStyle>
+  <p:extLst>
+    <p:ext uri="{EFAFB233-063F-42B5-8137-9DF3F51BA10A}">
+      <p15:sldGuideLst xmlns:p15="http://schemas.microsoft.com/office/powerpoint/2012/main"/>
+    </p:ext>
+  </p:extLst>
 </p:presentation>
 </file>
 
 <file path=ppt/charts/chart1.xml><?xml version="1.0" encoding="utf-8"?>
-<c:chartSpace xmlns:c="http://schemas.openxmlformats.org/drawingml/2006/chart" xmlns:a="http://schemas.openxmlformats.org/drawingml/2006/main" xmlns:r="http://schemas.openxmlformats.org/officeDocument/2006/relationships">
+<c:chartSpace xmlns:c="http://schemas.openxmlformats.org/drawingml/2006/chart" xmlns:a="http://schemas.openxmlformats.org/drawingml/2006/main" xmlns:r="http://schemas.openxmlformats.org/officeDocument/2006/relationships" xmlns:c16r2="http://schemas.microsoft.com/office/drawing/2015/06/chart">
   <c:date1904 val="0"/>
+  <c:lang val="en-US"/>
   <c:roundedCorners val="1"/>
+  <c:style val="2"/>
   <c:chart>
     <c:title>
       <c:tx>
@@ -142,7 +149,7 @@
               </a:defRPr>
             </a:pPr>
             <a:r>
-              <a:rPr sz="1300" b="0" i="0" u="none" strike="noStrike">
+              <a:rPr lang="en-US" sz="1300" b="0" i="0" u="none" strike="noStrike">
                 <a:solidFill>
                   <a:srgbClr val="0F172A"/>
                 </a:solidFill>
@@ -153,7 +160,6 @@
           </a:p>
         </c:rich>
       </c:tx>
-      <c:layout/>
       <c:overlay val="0"/>
     </c:title>
     <c:autoTitleDeleted val="0"/>
@@ -185,19 +191,27 @@
           </c:spPr>
           <c:invertIfNegative val="0"/>
           <c:dLbls>
-            <c:numFmt formatCode="$#,##0" sourceLinked="0"/>
+            <c:numFmt formatCode="\$#,##0" sourceLinked="0"/>
+            <c:spPr>
+              <a:noFill/>
+              <a:ln>
+                <a:noFill/>
+              </a:ln>
+              <a:effectLst/>
+            </c:spPr>
             <c:txPr>
               <a:bodyPr/>
               <a:lstStyle/>
               <a:p>
                 <a:pPr>
-                  <a:defRPr b="0" i="0" strike="noStrike" sz="900" u="none">
+                  <a:defRPr sz="900" b="0" i="0" u="none" strike="noStrike">
                     <a:solidFill>
                       <a:srgbClr val="0F172A"/>
                     </a:solidFill>
                     <a:latin typeface="Arial"/>
                   </a:defRPr>
                 </a:pPr>
+                <a:endParaRPr lang="en-US"/>
               </a:p>
             </c:txPr>
             <c:showLegendKey val="0"/>
@@ -207,31 +221,34 @@
             <c:showPercent val="0"/>
             <c:showBubbleSize val="0"/>
             <c:showLeaderLines val="0"/>
+            <c:extLst>
+              <c:ext xmlns:c15="http://schemas.microsoft.com/office/drawing/2012/chart" uri="{CE6537A1-D6FC-4f65-9D91-7224C49458BB}">
+                <c15:showLeaderLines val="0"/>
+              </c:ext>
+            </c:extLst>
           </c:dLbls>
           <c:cat>
-            <c:multiLvlStrRef>
+            <c:strRef>
               <c:f>Sheet1!$A$2:$A$6</c:f>
-              <c:multiLvlStrCache>
+              <c:strCache>
                 <c:ptCount val="5"/>
-                <c:lvl>
-                  <c:pt idx="0">
-                    <c:v>Insulin glargine</c:v>
-                  </c:pt>
-                  <c:pt idx="1">
-                    <c:v>Albuterol</c:v>
-                  </c:pt>
-                  <c:pt idx="2">
-                    <c:v>Atorvastatin</c:v>
-                  </c:pt>
-                  <c:pt idx="3">
-                    <c:v>Amoxicillin</c:v>
-                  </c:pt>
-                  <c:pt idx="4">
-                    <c:v>Metformin</c:v>
-                  </c:pt>
-                </c:lvl>
-              </c:multiLvlStrCache>
-            </c:multiLvlStrRef>
+                <c:pt idx="0">
+                  <c:v>Insulin glargine</c:v>
+                </c:pt>
+                <c:pt idx="1">
+                  <c:v>Albuterol</c:v>
+                </c:pt>
+                <c:pt idx="2">
+                  <c:v>Atorvastatin</c:v>
+                </c:pt>
+                <c:pt idx="3">
+                  <c:v>Amoxicillin</c:v>
+                </c:pt>
+                <c:pt idx="4">
+                  <c:v>Metformin</c:v>
+                </c:pt>
+              </c:strCache>
+            </c:strRef>
           </c:cat>
           <c:val>
             <c:numRef>
@@ -257,36 +274,23 @@
               </c:numCache>
             </c:numRef>
           </c:val>
+          <c:extLst>
+            <c:ext xmlns:c16="http://schemas.microsoft.com/office/drawing/2014/chart" uri="{C3380CC4-5D6E-409C-BE32-E72D297353CC}">
+              <c16:uniqueId val="{00000000-458F-4FA7-B6E9-886ACE9A3223}"/>
+            </c:ext>
+          </c:extLst>
         </c:ser>
         <c:dLbls>
-          <c:numFmt formatCode="$#,##0" sourceLinked="0"/>
-          <c:txPr>
-            <a:bodyPr/>
-            <a:lstStyle/>
-            <a:p>
-              <a:pPr>
-                <a:defRPr b="0" i="0" strike="noStrike" sz="900" u="none">
-                  <a:solidFill>
-                    <a:srgbClr val="0F172A"/>
-                  </a:solidFill>
-                  <a:latin typeface="Arial"/>
-                </a:defRPr>
-              </a:pPr>
-            </a:p>
-          </c:txPr>
           <c:showLegendKey val="0"/>
           <c:showVal val="1"/>
           <c:showCatName val="0"/>
           <c:showSerName val="0"/>
           <c:showPercent val="0"/>
           <c:showBubbleSize val="0"/>
-          <c:showLeaderLines val="0"/>
         </c:dLbls>
         <c:gapWidth val="150"/>
-        <c:overlap val="0"/>
         <c:axId val="2094734554"/>
         <c:axId val="2094734552"/>
-        <c:axId val="2094734556"/>
       </c:barChart>
       <c:catAx>
         <c:axId val="2094734554"/>
@@ -327,6 +331,7 @@
         <c:crosses val="autoZero"/>
         <c:auto val="1"/>
         <c:lblAlgn val="ctr"/>
+        <c:lblOffset val="100"/>
         <c:noMultiLvlLbl val="1"/>
       </c:catAx>
       <c:valAx>
@@ -351,30 +356,6 @@
         <c:majorTickMark val="out"/>
         <c:minorTickMark val="none"/>
         <c:tickLblPos val="low"/>
-        <c:spPr>
-          <a:ln w="12700" cap="flat">
-            <a:solidFill>
-              <a:srgbClr val="888888"/>
-            </a:solidFill>
-            <a:prstDash val="solid"/>
-            <a:round/>
-          </a:ln>
-        </c:spPr>
-        <c:txPr>
-          <a:bodyPr/>
-          <a:lstStyle/>
-          <a:p>
-            <a:pPr>
-              <a:defRPr sz="900" b="0" i="0" u="none" strike="noStrike">
-                <a:solidFill>
-                  <a:srgbClr val="94A3B8"/>
-                </a:solidFill>
-                <a:latin typeface="Arial"/>
-              </a:defRPr>
-            </a:pPr>
-            <a:endParaRPr lang="en-US"/>
-          </a:p>
-        </c:txPr>
         <c:crossAx val="2094734554"/>
         <c:crosses val="autoZero"/>
         <c:crossBetween val="between"/>
@@ -389,6 +370,7 @@
     </c:plotArea>
     <c:plotVisOnly val="1"/>
     <c:dispBlanksAs val="span"/>
+    <c:showDLblsOverMax val="1"/>
   </c:chart>
   <c:spPr>
     <a:solidFill>
@@ -427,234 +409,10 @@
           <a:chExt cx="0" cy="0"/>
         </a:xfrm>
       </p:grpSpPr>
-      <p:sp>
-        <p:nvSpPr>
-          <p:cNvPr id="2" name="Header Placeholder 1"/>
-          <p:cNvSpPr>
-            <a:spLocks noGrp="1"/>
-          </p:cNvSpPr>
-          <p:nvPr>
-            <p:ph type="hdr" sz="quarter"/>
-          </p:nvPr>
-        </p:nvSpPr>
-        <p:spPr>
-          <a:xfrm>
-            <a:off x="0" y="0"/>
-            <a:ext cx="2971800" cy="458788"/>
-          </a:xfrm>
-          <a:prstGeom prst="rect">
-            <a:avLst/>
-          </a:prstGeom>
-        </p:spPr>
-        <p:txBody>
-          <a:bodyPr vert="horz" lIns="91440" tIns="45720" rIns="91440" bIns="45720" rtlCol="0"/>
-          <a:lstStyle>
-            <a:lvl1pPr algn="l">
-              <a:defRPr sz="1200"/>
-            </a:lvl1pPr>
-          </a:lstStyle>
-          <a:p>
-            <a:endParaRPr lang="en-US"/>
-          </a:p>
-        </p:txBody>
-      </p:sp>
-      <p:sp>
-        <p:nvSpPr>
-          <p:cNvPr id="3" name="Date Placeholder 2"/>
-          <p:cNvSpPr>
-            <a:spLocks noGrp="1"/>
-          </p:cNvSpPr>
-          <p:nvPr>
-            <p:ph type="dt" idx="1"/>
-          </p:nvPr>
-        </p:nvSpPr>
-        <p:spPr>
-          <a:xfrm>
-            <a:off x="3884613" y="0"/>
-            <a:ext cx="2971800" cy="458788"/>
-          </a:xfrm>
-          <a:prstGeom prst="rect">
-            <a:avLst/>
-          </a:prstGeom>
-        </p:spPr>
-        <p:txBody>
-          <a:bodyPr vert="horz" lIns="91440" tIns="45720" rIns="91440" bIns="45720" rtlCol="0"/>
-          <a:lstStyle>
-            <a:lvl1pPr algn="r">
-              <a:defRPr sz="1200"/>
-            </a:lvl1pPr>
-          </a:lstStyle>
-          <a:p>
-            <a:fld id="{5282F153-3F37-0F45-9E97-73ACFA13230C}" type="datetimeFigureOut">
-              <a:rPr lang="en-US"/>
-              <a:t>7/23/19</a:t>
-            </a:fld>
-            <a:endParaRPr lang="en-US"/>
-          </a:p>
-        </p:txBody>
-      </p:sp>
-      <p:sp>
-        <p:nvSpPr>
-          <p:cNvPr id="4" name="Slide Image Placeholder 3"/>
-          <p:cNvSpPr>
-            <a:spLocks noGrp="1" noRot="1" noChangeAspect="1"/>
-          </p:cNvSpPr>
-          <p:nvPr>
-            <p:ph type="sldImg" idx="2"/>
-          </p:nvPr>
-        </p:nvSpPr>
-        <p:spPr>
-          <a:xfrm>
-            <a:off x="685800" y="1143000"/>
-            <a:ext cx="5486400" cy="3086100"/>
-          </a:xfrm>
-          <a:prstGeom prst="rect">
-            <a:avLst/>
-          </a:prstGeom>
-          <a:noFill/>
-          <a:ln w="12700">
-            <a:solidFill>
-              <a:prstClr val="black"/>
-            </a:solidFill>
-          </a:ln>
-        </p:spPr>
-        <p:txBody>
-          <a:bodyPr vert="horz" lIns="91440" tIns="45720" rIns="91440" bIns="45720" rtlCol="0" anchor="ctr"/>
-          <a:lstStyle/>
-          <a:p>
-            <a:endParaRPr lang="en-US"/>
-          </a:p>
-        </p:txBody>
-      </p:sp>
-      <p:sp>
-        <p:nvSpPr>
-          <p:cNvPr id="5" name="Notes Placeholder 4"/>
-          <p:cNvSpPr>
-            <a:spLocks noGrp="1"/>
-          </p:cNvSpPr>
-          <p:nvPr>
-            <p:ph type="body" sz="quarter" idx="3"/>
-          </p:nvPr>
-        </p:nvSpPr>
-        <p:spPr>
-          <a:xfrm>
-            <a:off x="685800" y="4400550"/>
-            <a:ext cx="5486400" cy="3600450"/>
-          </a:xfrm>
-          <a:prstGeom prst="rect">
-            <a:avLst/>
-          </a:prstGeom>
-        </p:spPr>
-        <p:txBody>
-          <a:bodyPr vert="horz" lIns="91440" tIns="45720" rIns="91440" bIns="45720" rtlCol="0"/>
-          <a:lstStyle/>
-          <a:p>
-            <a:pPr lvl="0"/>
-            <a:r>
-              <a:rPr lang="en-US"/>
-              <a:t>Click to edit Master text styles</a:t>
-            </a:r>
-          </a:p>
-          <a:p>
-            <a:pPr lvl="1"/>
-            <a:r>
-              <a:rPr lang="en-US"/>
-              <a:t>Second level</a:t>
-            </a:r>
-          </a:p>
-          <a:p>
-            <a:pPr lvl="2"/>
-            <a:r>
-              <a:rPr lang="en-US"/>
-              <a:t>Third level</a:t>
-            </a:r>
-          </a:p>
-          <a:p>
-            <a:pPr lvl="3"/>
-            <a:r>
-              <a:rPr lang="en-US"/>
-              <a:t>Fourth level</a:t>
-            </a:r>
-          </a:p>
-          <a:p>
-            <a:pPr lvl="4"/>
-            <a:r>
-              <a:rPr lang="en-US"/>
-              <a:t>Fifth level</a:t>
-            </a:r>
-          </a:p>
-        </p:txBody>
-      </p:sp>
-      <p:sp>
-        <p:nvSpPr>
-          <p:cNvPr id="6" name="Footer Placeholder 5"/>
-          <p:cNvSpPr>
-            <a:spLocks noGrp="1"/>
-          </p:cNvSpPr>
-          <p:nvPr>
-            <p:ph type="ftr" sz="quarter" idx="4"/>
-          </p:nvPr>
-        </p:nvSpPr>
-        <p:spPr>
-          <a:xfrm>
-            <a:off x="0" y="8685213"/>
-            <a:ext cx="2971800" cy="458787"/>
-          </a:xfrm>
-          <a:prstGeom prst="rect">
-            <a:avLst/>
-          </a:prstGeom>
-        </p:spPr>
-        <p:txBody>
-          <a:bodyPr vert="horz" lIns="91440" tIns="45720" rIns="91440" bIns="45720" rtlCol="0" anchor="b"/>
-          <a:lstStyle>
-            <a:lvl1pPr algn="l">
-              <a:defRPr sz="1200"/>
-            </a:lvl1pPr>
-          </a:lstStyle>
-          <a:p>
-            <a:endParaRPr lang="en-US"/>
-          </a:p>
-        </p:txBody>
-      </p:sp>
-      <p:sp>
-        <p:nvSpPr>
-          <p:cNvPr id="7" name="Slide Number Placeholder 6"/>
-          <p:cNvSpPr>
-            <a:spLocks noGrp="1"/>
-          </p:cNvSpPr>
-          <p:nvPr>
-            <p:ph type="sldNum" sz="quarter" idx="5"/>
-          </p:nvPr>
-        </p:nvSpPr>
-        <p:spPr>
-          <a:xfrm>
-            <a:off x="3884613" y="8685213"/>
-            <a:ext cx="2971800" cy="458787"/>
-          </a:xfrm>
-          <a:prstGeom prst="rect">
-            <a:avLst/>
-          </a:prstGeom>
-        </p:spPr>
-        <p:txBody>
-          <a:bodyPr vert="horz" lIns="91440" tIns="45720" rIns="91440" bIns="45720" rtlCol="0" anchor="b"/>
-          <a:lstStyle>
-            <a:lvl1pPr algn="r">
-              <a:defRPr sz="1200"/>
-            </a:lvl1pPr>
-          </a:lstStyle>
-          <a:p>
-            <a:fld id="{CE5E9CC1-C706-0F49-92D6-E571CC5EEA8F}" type="slidenum">
-              <a:rPr lang="en-US"/>
-              <a:t>‹#›</a:t>
-            </a:fld>
-            <a:endParaRPr lang="en-US"/>
-          </a:p>
-        </p:txBody>
-      </p:sp>
     </p:spTree>
     <p:extLst>
       <p:ext uri="{BB962C8B-B14F-4D97-AF65-F5344CB8AC3E}">
-        <p14:creationId xmlns:p14="http://schemas.microsoft.com/office/powerpoint/2010/main" val="1024086991"/>
+        <p14:creationId xmlns:p14="http://schemas.microsoft.com/office/powerpoint/2010/main" val="1597030414"/>
       </p:ext>
     </p:extLst>
   </p:cSld>
@@ -798,10 +556,6 @@
           <a:bodyPr/>
           <a:lstStyle/>
           <a:p>
-            <a:r>
-              <a:rPr lang="en-US" dirty="0"/>
-              <a:t/>
-            </a:r>
             <a:endParaRPr lang="en-US" dirty="0"/>
           </a:p>
         </p:txBody>
@@ -886,10 +640,6 @@
           <a:bodyPr/>
           <a:lstStyle/>
           <a:p>
-            <a:r>
-              <a:rPr lang="en-US" dirty="0"/>
-              <a:t/>
-            </a:r>
             <a:endParaRPr lang="en-US" dirty="0"/>
           </a:p>
         </p:txBody>
@@ -974,10 +724,6 @@
           <a:bodyPr/>
           <a:lstStyle/>
           <a:p>
-            <a:r>
-              <a:rPr lang="en-US" dirty="0"/>
-              <a:t/>
-            </a:r>
             <a:endParaRPr lang="en-US" dirty="0"/>
           </a:p>
         </p:txBody>
@@ -1062,10 +808,6 @@
           <a:bodyPr/>
           <a:lstStyle/>
           <a:p>
-            <a:r>
-              <a:rPr lang="en-US" dirty="0"/>
-              <a:t/>
-            </a:r>
             <a:endParaRPr lang="en-US" dirty="0"/>
           </a:p>
         </p:txBody>
@@ -1150,10 +892,6 @@
           <a:bodyPr/>
           <a:lstStyle/>
           <a:p>
-            <a:r>
-              <a:rPr lang="en-US" dirty="0"/>
-              <a:t/>
-            </a:r>
             <a:endParaRPr lang="en-US" dirty="0"/>
           </a:p>
         </p:txBody>
@@ -1238,10 +976,6 @@
           <a:bodyPr/>
           <a:lstStyle/>
           <a:p>
-            <a:r>
-              <a:rPr lang="en-US" dirty="0"/>
-              <a:t/>
-            </a:r>
             <a:endParaRPr lang="en-US" dirty="0"/>
           </a:p>
         </p:txBody>
@@ -1326,10 +1060,6 @@
           <a:bodyPr/>
           <a:lstStyle/>
           <a:p>
-            <a:r>
-              <a:rPr lang="en-US" dirty="0"/>
-              <a:t/>
-            </a:r>
             <a:endParaRPr lang="en-US" dirty="0"/>
           </a:p>
         </p:txBody>
@@ -1414,10 +1144,6 @@
           <a:bodyPr/>
           <a:lstStyle/>
           <a:p>
-            <a:r>
-              <a:rPr lang="en-US" dirty="0"/>
-              <a:t/>
-            </a:r>
             <a:endParaRPr lang="en-US" dirty="0"/>
           </a:p>
         </p:txBody>
@@ -1502,10 +1228,6 @@
           <a:bodyPr/>
           <a:lstStyle/>
           <a:p>
-            <a:r>
-              <a:rPr lang="en-US" dirty="0"/>
-              <a:t/>
-            </a:r>
             <a:endParaRPr lang="en-US" dirty="0"/>
           </a:p>
         </p:txBody>
@@ -1590,10 +1312,6 @@
           <a:bodyPr/>
           <a:lstStyle/>
           <a:p>
-            <a:r>
-              <a:rPr lang="en-US" dirty="0"/>
-              <a:t/>
-            </a:r>
             <a:endParaRPr lang="en-US" dirty="0"/>
           </a:p>
         </p:txBody>
@@ -1678,10 +1396,6 @@
           <a:bodyPr/>
           <a:lstStyle/>
           <a:p>
-            <a:r>
-              <a:rPr lang="en-US" dirty="0"/>
-              <a:t/>
-            </a:r>
             <a:endParaRPr lang="en-US" dirty="0"/>
           </a:p>
         </p:txBody>
@@ -1766,10 +1480,6 @@
           <a:bodyPr/>
           <a:lstStyle/>
           <a:p>
-            <a:r>
-              <a:rPr lang="en-US" dirty="0"/>
-              <a:t/>
-            </a:r>
             <a:endParaRPr lang="en-US" dirty="0"/>
           </a:p>
         </p:txBody>
@@ -1854,10 +1564,6 @@
           <a:bodyPr/>
           <a:lstStyle/>
           <a:p>
-            <a:r>
-              <a:rPr lang="en-US" dirty="0"/>
-              <a:t/>
-            </a:r>
             <a:endParaRPr lang="en-US" dirty="0"/>
           </a:p>
         </p:txBody>
@@ -1942,10 +1648,6 @@
           <a:bodyPr/>
           <a:lstStyle/>
           <a:p>
-            <a:r>
-              <a:rPr lang="en-US" dirty="0"/>
-              <a:t/>
-            </a:r>
             <a:endParaRPr lang="en-US" dirty="0"/>
           </a:p>
         </p:txBody>
@@ -2030,10 +1732,6 @@
           <a:bodyPr/>
           <a:lstStyle/>
           <a:p>
-            <a:r>
-              <a:rPr lang="en-US" dirty="0"/>
-              <a:t/>
-            </a:r>
             <a:endParaRPr lang="en-US" dirty="0"/>
           </a:p>
         </p:txBody>
@@ -2118,10 +1816,6 @@
           <a:bodyPr/>
           <a:lstStyle/>
           <a:p>
-            <a:r>
-              <a:rPr lang="en-US" dirty="0"/>
-              <a:t/>
-            </a:r>
             <a:endParaRPr lang="en-US" dirty="0"/>
           </a:p>
         </p:txBody>
@@ -2195,6 +1889,11 @@
 <file path=ppt/slideMasters/slideMaster1.xml><?xml version="1.0" encoding="utf-8"?>
 <p:sldMaster xmlns:a="http://schemas.openxmlformats.org/drawingml/2006/main" xmlns:r="http://schemas.openxmlformats.org/officeDocument/2006/relationships" xmlns:p="http://schemas.openxmlformats.org/presentationml/2006/main">
   <p:cSld>
+    <p:bg>
+      <p:bgRef idx="1001">
+        <a:schemeClr val="bg1"/>
+      </p:bgRef>
+    </p:bg>
     <p:spTree>
       <p:nvGrpSpPr>
         <p:cNvPr id="1" name=""/>
@@ -2477,6 +2176,7 @@
         <a:solidFill>
           <a:srgbClr val="0B3B39"/>
         </a:solidFill>
+        <a:effectLst/>
       </p:bgPr>
     </p:bg>
     <p:spTree>
@@ -2521,6 +2221,13 @@
             <a:prstDash val="solid"/>
           </a:ln>
         </p:spPr>
+        <p:txBody>
+          <a:bodyPr/>
+          <a:lstStyle/>
+          <a:p>
+            <a:endParaRPr lang="en-US"/>
+          </a:p>
+        </p:txBody>
       </p:sp>
       <p:sp>
         <p:nvSpPr>
@@ -2550,6 +2257,13 @@
             <a:prstDash val="solid"/>
           </a:ln>
         </p:spPr>
+        <p:txBody>
+          <a:bodyPr/>
+          <a:lstStyle/>
+          <a:p>
+            <a:endParaRPr lang="en-US"/>
+          </a:p>
+        </p:txBody>
       </p:sp>
       <p:sp>
         <p:nvSpPr>
@@ -2579,6 +2293,13 @@
             <a:prstDash val="solid"/>
           </a:ln>
         </p:spPr>
+        <p:txBody>
+          <a:bodyPr/>
+          <a:lstStyle/>
+          <a:p>
+            <a:endParaRPr lang="en-US"/>
+          </a:p>
+        </p:txBody>
       </p:sp>
       <p:sp>
         <p:nvSpPr>
@@ -2608,6 +2329,13 @@
             <a:prstDash val="solid"/>
           </a:ln>
         </p:spPr>
+        <p:txBody>
+          <a:bodyPr/>
+          <a:lstStyle/>
+          <a:p>
+            <a:endParaRPr lang="en-US"/>
+          </a:p>
+        </p:txBody>
       </p:sp>
       <p:sp>
         <p:nvSpPr>
@@ -2628,6 +2356,13 @@
           </a:solidFill>
           <a:ln/>
         </p:spPr>
+        <p:txBody>
+          <a:bodyPr/>
+          <a:lstStyle/>
+          <a:p>
+            <a:endParaRPr lang="en-US"/>
+          </a:p>
+        </p:txBody>
       </p:sp>
       <p:sp>
         <p:nvSpPr>
@@ -2650,7 +2385,7 @@
           <a:bodyPr wrap="square" rtlCol="0" anchor="ctr"/>
           <a:lstStyle/>
           <a:p>
-            <a:pPr algn="ctr" indent="0" marL="0">
+            <a:pPr marL="0" indent="0" algn="ctr">
               <a:buNone/>
             </a:pPr>
             <a:r>
@@ -2689,11 +2424,11 @@
           <a:bodyPr wrap="square" lIns="0" tIns="0" rIns="0" bIns="0" rtlCol="0" anchor="ctr"/>
           <a:lstStyle/>
           <a:p>
-            <a:pPr indent="0" marL="0">
-              <a:buNone/>
-            </a:pPr>
-            <a:r>
-              <a:rPr lang="en-US" sz="1300" b="1" spc="200" kern="0" dirty="0">
+            <a:pPr marL="0" indent="0">
+              <a:buNone/>
+            </a:pPr>
+            <a:r>
+              <a:rPr lang="en-US" sz="1300" b="1" kern="0" spc="200" dirty="0">
                 <a:solidFill>
                   <a:srgbClr val="5EEAD4"/>
                 </a:solidFill>
@@ -2728,7 +2463,7 @@
           <a:bodyPr wrap="square" lIns="0" tIns="0" rIns="0" bIns="0" rtlCol="0" anchor="ctr"/>
           <a:lstStyle/>
           <a:p>
-            <a:pPr indent="0" marL="0">
+            <a:pPr marL="0" indent="0">
               <a:lnSpc>
                 <a:spcPct val="98000"/>
               </a:lnSpc>
@@ -2748,7 +2483,7 @@
             <a:endParaRPr lang="en-US" sz="4000" dirty="0"/>
           </a:p>
           <a:p>
-            <a:pPr indent="0" marL="0">
+            <a:pPr marL="0" indent="0">
               <a:lnSpc>
                 <a:spcPct val="98000"/>
               </a:lnSpc>
@@ -2790,7 +2525,7 @@
           <a:bodyPr wrap="square" lIns="0" tIns="0" rIns="0" bIns="0" rtlCol="0" anchor="ctr"/>
           <a:lstStyle/>
           <a:p>
-            <a:pPr indent="0" marL="0">
+            <a:pPr marL="0" indent="0">
               <a:buNone/>
             </a:pPr>
             <a:r>
@@ -2829,6 +2564,13 @@
           </a:solidFill>
           <a:ln/>
         </p:spPr>
+        <p:txBody>
+          <a:bodyPr/>
+          <a:lstStyle/>
+          <a:p>
+            <a:endParaRPr lang="en-US"/>
+          </a:p>
+        </p:txBody>
       </p:sp>
       <p:sp>
         <p:nvSpPr>
@@ -2851,7 +2593,7 @@
           <a:bodyPr wrap="square" lIns="0" tIns="0" rIns="0" bIns="0" rtlCol="0" anchor="ctr"/>
           <a:lstStyle/>
           <a:p>
-            <a:pPr algn="ctr" indent="0" marL="0">
+            <a:pPr marL="0" indent="0" algn="ctr">
               <a:buNone/>
             </a:pPr>
             <a:r>
@@ -2871,30 +2613,33 @@
       </p:sp>
       <p:sp>
         <p:nvSpPr>
-          <p:cNvPr id="13" name="Text 11"/>
-          <p:cNvSpPr/>
-          <p:nvPr/>
-        </p:nvSpPr>
-        <p:spPr>
-          <a:xfrm>
-            <a:off x="2697480" y="3977640"/>
-            <a:ext cx="5486400" cy="457200"/>
-          </a:xfrm>
-          <a:prstGeom prst="rect">
-            <a:avLst/>
-          </a:prstGeom>
-          <a:noFill/>
-          <a:ln/>
-        </p:spPr>
-        <p:txBody>
-          <a:bodyPr wrap="square" lIns="0" tIns="0" rIns="0" bIns="0" rtlCol="0" anchor="ctr"/>
-          <a:lstStyle/>
-          <a:p>
-            <a:pPr indent="0" marL="0">
-              <a:buNone/>
-            </a:pPr>
-            <a:r>
-              <a:rPr lang="en-US" sz="1200" dirty="0">
+          <p:cNvPr id="19" name="Text 8">
+            <a:extLst>
+              <a:ext uri="{FF2B5EF4-FFF2-40B4-BE49-F238E27FC236}">
+                <a16:creationId xmlns:a16="http://schemas.microsoft.com/office/drawing/2014/main" id="{C6728550-D806-40F1-4103-EC3506E85C94}"/>
+              </a:ext>
+            </a:extLst>
+          </p:cNvPr>
+          <p:cNvSpPr/>
+          <p:nvPr/>
+        </p:nvSpPr>
+        <p:spPr>
+          <a:xfrm>
+            <a:off x="2606042" y="4057650"/>
+            <a:ext cx="8046720" cy="320040"/>
+          </a:xfrm>
+          <a:prstGeom prst="rect">
+            <a:avLst/>
+          </a:prstGeom>
+          <a:noFill/>
+          <a:ln/>
+        </p:spPr>
+        <p:txBody>
+          <a:bodyPr wrap="square" lIns="0" tIns="0" rIns="0" bIns="0" rtlCol="0" anchor="ctr"/>
+          <a:lstStyle/>
+          <a:p>
+            <a:r>
+              <a:rPr lang="ar-EG" sz="1100" dirty="0">
                 <a:solidFill>
                   <a:srgbClr val="5EEAD4"/>
                 </a:solidFill>
@@ -2902,9 +2647,20 @@
                 <a:ea typeface="Calibri" pitchFamily="34" charset="-122"/>
                 <a:cs typeface="Calibri" pitchFamily="34" charset="-120"/>
               </a:rPr>
-              <a:t>Mahmoud Ali Salem (Team Lead) + 5   ·   Group MNF4_AIS5_S1</a:t>
-            </a:r>
-            <a:endParaRPr lang="en-US" sz="1200" dirty="0"/>
+              <a:t> </a:t>
+            </a:r>
+            <a:r>
+              <a:rPr lang="en-US" sz="1100" dirty="0">
+                <a:solidFill>
+                  <a:srgbClr val="CFF5EF"/>
+                </a:solidFill>
+                <a:latin typeface="Calibri" pitchFamily="34" charset="0"/>
+                <a:ea typeface="Calibri" pitchFamily="34" charset="-122"/>
+                <a:cs typeface="Calibri" pitchFamily="34" charset="-120"/>
+              </a:rPr>
+              <a:t>Mahmoud Ali Salem  ·  Ahmed Gamal  ·  Hussein Gabr  ·  John Emad  ·  Mahmoud Tolan  ·  Reem Ashraf</a:t>
+            </a:r>
+            <a:endParaRPr lang="en-US" sz="1100" dirty="0"/>
           </a:p>
         </p:txBody>
       </p:sp>
@@ -2924,6 +2680,7 @@
         <a:solidFill>
           <a:srgbClr val="FFFFFF"/>
         </a:solidFill>
+        <a:effectLst/>
       </p:bgPr>
     </p:bg>
     <p:spTree>
@@ -2961,11 +2718,11 @@
           <a:bodyPr wrap="square" lIns="0" tIns="0" rIns="0" bIns="0" rtlCol="0" anchor="ctr"/>
           <a:lstStyle/>
           <a:p>
-            <a:pPr indent="0" marL="0">
-              <a:buNone/>
-            </a:pPr>
-            <a:r>
-              <a:rPr lang="en-US" sz="1200" b="1" spc="200" kern="0" dirty="0">
+            <a:pPr marL="0" indent="0">
+              <a:buNone/>
+            </a:pPr>
+            <a:r>
+              <a:rPr lang="en-US" sz="1200" b="1" kern="0" spc="200" dirty="0">
                 <a:solidFill>
                   <a:srgbClr val="0F766E"/>
                 </a:solidFill>
@@ -3000,7 +2757,7 @@
           <a:bodyPr wrap="square" lIns="0" tIns="0" rIns="0" bIns="0" rtlCol="0" anchor="ctr"/>
           <a:lstStyle/>
           <a:p>
-            <a:pPr indent="0" marL="0">
+            <a:pPr marL="0" indent="0">
               <a:buNone/>
             </a:pPr>
             <a:r>
@@ -3044,13 +2801,20 @@
             <a:prstDash val="solid"/>
           </a:ln>
           <a:effectLst>
-            <a:outerShdw sx="100000" sy="100000" kx="0" ky="0" algn="bl" rotWithShape="0" blurRad="88900" dist="38100" dir="5400000">
+            <a:outerShdw blurRad="88900" dist="38100" dir="5400000" algn="bl" rotWithShape="0">
               <a:srgbClr val="0F172A">
                 <a:alpha val="13000"/>
               </a:srgbClr>
             </a:outerShdw>
           </a:effectLst>
         </p:spPr>
+        <p:txBody>
+          <a:bodyPr/>
+          <a:lstStyle/>
+          <a:p>
+            <a:endParaRPr lang="en-US"/>
+          </a:p>
+        </p:txBody>
       </p:sp>
       <p:sp>
         <p:nvSpPr>
@@ -3073,7 +2837,7 @@
           <a:bodyPr wrap="square" lIns="0" tIns="0" rIns="0" bIns="0" rtlCol="0" anchor="ctr"/>
           <a:lstStyle/>
           <a:p>
-            <a:pPr algn="ctr" indent="0" marL="0">
+            <a:pPr marL="0" indent="0" algn="ctr">
               <a:buNone/>
             </a:pPr>
             <a:r>
@@ -3112,7 +2876,7 @@
           <a:bodyPr wrap="square" lIns="0" tIns="0" rIns="0" bIns="0" rtlCol="0" anchor="ctr"/>
           <a:lstStyle/>
           <a:p>
-            <a:pPr algn="ctr" indent="0" marL="0">
+            <a:pPr marL="0" indent="0" algn="ctr">
               <a:buNone/>
             </a:pPr>
             <a:r>
@@ -3156,13 +2920,20 @@
             <a:prstDash val="solid"/>
           </a:ln>
           <a:effectLst>
-            <a:outerShdw sx="100000" sy="100000" kx="0" ky="0" algn="bl" rotWithShape="0" blurRad="88900" dist="38100" dir="5400000">
+            <a:outerShdw blurRad="88900" dist="38100" dir="5400000" algn="bl" rotWithShape="0">
               <a:srgbClr val="0F172A">
                 <a:alpha val="13000"/>
               </a:srgbClr>
             </a:outerShdw>
           </a:effectLst>
         </p:spPr>
+        <p:txBody>
+          <a:bodyPr/>
+          <a:lstStyle/>
+          <a:p>
+            <a:endParaRPr lang="en-US"/>
+          </a:p>
+        </p:txBody>
       </p:sp>
       <p:sp>
         <p:nvSpPr>
@@ -3185,7 +2956,7 @@
           <a:bodyPr wrap="square" lIns="0" tIns="0" rIns="0" bIns="0" rtlCol="0" anchor="ctr"/>
           <a:lstStyle/>
           <a:p>
-            <a:pPr algn="ctr" indent="0" marL="0">
+            <a:pPr marL="0" indent="0" algn="ctr">
               <a:buNone/>
             </a:pPr>
             <a:r>
@@ -3224,7 +2995,7 @@
           <a:bodyPr wrap="square" lIns="0" tIns="0" rIns="0" bIns="0" rtlCol="0" anchor="ctr"/>
           <a:lstStyle/>
           <a:p>
-            <a:pPr algn="ctr" indent="0" marL="0">
+            <a:pPr marL="0" indent="0" algn="ctr">
               <a:buNone/>
             </a:pPr>
             <a:r>
@@ -3268,13 +3039,20 @@
             <a:prstDash val="solid"/>
           </a:ln>
           <a:effectLst>
-            <a:outerShdw sx="100000" sy="100000" kx="0" ky="0" algn="bl" rotWithShape="0" blurRad="88900" dist="38100" dir="5400000">
+            <a:outerShdw blurRad="88900" dist="38100" dir="5400000" algn="bl" rotWithShape="0">
               <a:srgbClr val="0F172A">
                 <a:alpha val="13000"/>
               </a:srgbClr>
             </a:outerShdw>
           </a:effectLst>
         </p:spPr>
+        <p:txBody>
+          <a:bodyPr/>
+          <a:lstStyle/>
+          <a:p>
+            <a:endParaRPr lang="en-US"/>
+          </a:p>
+        </p:txBody>
       </p:sp>
       <p:sp>
         <p:nvSpPr>
@@ -3297,7 +3075,7 @@
           <a:bodyPr wrap="square" lIns="0" tIns="0" rIns="0" bIns="0" rtlCol="0" anchor="ctr"/>
           <a:lstStyle/>
           <a:p>
-            <a:pPr algn="ctr" indent="0" marL="0">
+            <a:pPr marL="0" indent="0" algn="ctr">
               <a:buNone/>
             </a:pPr>
             <a:r>
@@ -3336,7 +3114,7 @@
           <a:bodyPr wrap="square" lIns="0" tIns="0" rIns="0" bIns="0" rtlCol="0" anchor="ctr"/>
           <a:lstStyle/>
           <a:p>
-            <a:pPr algn="ctr" indent="0" marL="0">
+            <a:pPr marL="0" indent="0" algn="ctr">
               <a:buNone/>
             </a:pPr>
             <a:r>
@@ -3380,13 +3158,20 @@
             <a:prstDash val="solid"/>
           </a:ln>
           <a:effectLst>
-            <a:outerShdw sx="100000" sy="100000" kx="0" ky="0" algn="bl" rotWithShape="0" blurRad="88900" dist="38100" dir="5400000">
+            <a:outerShdw blurRad="88900" dist="38100" dir="5400000" algn="bl" rotWithShape="0">
               <a:srgbClr val="0F172A">
                 <a:alpha val="13000"/>
               </a:srgbClr>
             </a:outerShdw>
           </a:effectLst>
         </p:spPr>
+        <p:txBody>
+          <a:bodyPr/>
+          <a:lstStyle/>
+          <a:p>
+            <a:endParaRPr lang="en-US"/>
+          </a:p>
+        </p:txBody>
       </p:sp>
       <p:sp>
         <p:nvSpPr>
@@ -3409,7 +3194,7 @@
           <a:bodyPr wrap="square" lIns="0" tIns="0" rIns="0" bIns="0" rtlCol="0" anchor="ctr"/>
           <a:lstStyle/>
           <a:p>
-            <a:pPr algn="ctr" indent="0" marL="0">
+            <a:pPr marL="0" indent="0" algn="ctr">
               <a:buNone/>
             </a:pPr>
             <a:r>
@@ -3448,7 +3233,7 @@
           <a:bodyPr wrap="square" lIns="0" tIns="0" rIns="0" bIns="0" rtlCol="0" anchor="ctr"/>
           <a:lstStyle/>
           <a:p>
-            <a:pPr algn="ctr" indent="0" marL="0">
+            <a:pPr marL="0" indent="0" algn="ctr">
               <a:buNone/>
             </a:pPr>
             <a:r>
@@ -3492,13 +3277,20 @@
             <a:prstDash val="solid"/>
           </a:ln>
           <a:effectLst>
-            <a:outerShdw sx="100000" sy="100000" kx="0" ky="0" algn="bl" rotWithShape="0" blurRad="88900" dist="38100" dir="5400000">
+            <a:outerShdw blurRad="88900" dist="38100" dir="5400000" algn="bl" rotWithShape="0">
               <a:srgbClr val="0F172A">
                 <a:alpha val="13000"/>
               </a:srgbClr>
             </a:outerShdw>
           </a:effectLst>
         </p:spPr>
+        <p:txBody>
+          <a:bodyPr/>
+          <a:lstStyle/>
+          <a:p>
+            <a:endParaRPr lang="en-US"/>
+          </a:p>
+        </p:txBody>
       </p:sp>
       <p:sp>
         <p:nvSpPr>
@@ -3521,7 +3313,7 @@
           <a:bodyPr wrap="square" lIns="0" tIns="0" rIns="0" bIns="0" rtlCol="0" anchor="ctr"/>
           <a:lstStyle/>
           <a:p>
-            <a:pPr algn="ctr" indent="0" marL="0">
+            <a:pPr marL="0" indent="0" algn="ctr">
               <a:buNone/>
             </a:pPr>
             <a:r>
@@ -3560,7 +3352,7 @@
           <a:bodyPr wrap="square" lIns="0" tIns="0" rIns="0" bIns="0" rtlCol="0" anchor="ctr"/>
           <a:lstStyle/>
           <a:p>
-            <a:pPr algn="ctr" indent="0" marL="0">
+            <a:pPr marL="0" indent="0" algn="ctr">
               <a:buNone/>
             </a:pPr>
             <a:r>
@@ -3604,13 +3396,20 @@
             <a:prstDash val="solid"/>
           </a:ln>
           <a:effectLst>
-            <a:outerShdw sx="100000" sy="100000" kx="0" ky="0" algn="bl" rotWithShape="0" blurRad="88900" dist="38100" dir="5400000">
+            <a:outerShdw blurRad="88900" dist="38100" dir="5400000" algn="bl" rotWithShape="0">
               <a:srgbClr val="0F172A">
                 <a:alpha val="13000"/>
               </a:srgbClr>
             </a:outerShdw>
           </a:effectLst>
         </p:spPr>
+        <p:txBody>
+          <a:bodyPr/>
+          <a:lstStyle/>
+          <a:p>
+            <a:endParaRPr lang="en-US"/>
+          </a:p>
+        </p:txBody>
       </p:sp>
       <p:sp>
         <p:nvSpPr>
@@ -3633,7 +3432,7 @@
           <a:bodyPr wrap="square" lIns="0" tIns="0" rIns="0" bIns="0" rtlCol="0" anchor="ctr"/>
           <a:lstStyle/>
           <a:p>
-            <a:pPr algn="ctr" indent="0" marL="0">
+            <a:pPr marL="0" indent="0" algn="ctr">
               <a:buNone/>
             </a:pPr>
             <a:r>
@@ -3672,7 +3471,7 @@
           <a:bodyPr wrap="square" lIns="0" tIns="0" rIns="0" bIns="0" rtlCol="0" anchor="ctr"/>
           <a:lstStyle/>
           <a:p>
-            <a:pPr algn="ctr" indent="0" marL="0">
+            <a:pPr marL="0" indent="0" algn="ctr">
               <a:buNone/>
             </a:pPr>
             <a:r>
@@ -3716,13 +3515,20 @@
             <a:prstDash val="solid"/>
           </a:ln>
           <a:effectLst>
-            <a:outerShdw sx="100000" sy="100000" kx="0" ky="0" algn="bl" rotWithShape="0" blurRad="88900" dist="38100" dir="5400000">
+            <a:outerShdw blurRad="88900" dist="38100" dir="5400000" algn="bl" rotWithShape="0">
               <a:srgbClr val="0F172A">
                 <a:alpha val="13000"/>
               </a:srgbClr>
             </a:outerShdw>
           </a:effectLst>
         </p:spPr>
+        <p:txBody>
+          <a:bodyPr/>
+          <a:lstStyle/>
+          <a:p>
+            <a:endParaRPr lang="en-US"/>
+          </a:p>
+        </p:txBody>
       </p:sp>
       <p:sp>
         <p:nvSpPr>
@@ -3745,7 +3551,7 @@
           <a:bodyPr wrap="square" lIns="0" tIns="0" rIns="0" bIns="0" rtlCol="0" anchor="ctr"/>
           <a:lstStyle/>
           <a:p>
-            <a:pPr algn="ctr" indent="0" marL="0">
+            <a:pPr marL="0" indent="0" algn="ctr">
               <a:buNone/>
             </a:pPr>
             <a:r>
@@ -3784,7 +3590,7 @@
           <a:bodyPr wrap="square" lIns="0" tIns="0" rIns="0" bIns="0" rtlCol="0" anchor="ctr"/>
           <a:lstStyle/>
           <a:p>
-            <a:pPr algn="ctr" indent="0" marL="0">
+            <a:pPr marL="0" indent="0" algn="ctr">
               <a:buNone/>
             </a:pPr>
             <a:r>
@@ -3828,13 +3634,20 @@
             <a:prstDash val="solid"/>
           </a:ln>
           <a:effectLst>
-            <a:outerShdw sx="100000" sy="100000" kx="0" ky="0" algn="bl" rotWithShape="0" blurRad="88900" dist="38100" dir="5400000">
+            <a:outerShdw blurRad="88900" dist="38100" dir="5400000" algn="bl" rotWithShape="0">
               <a:srgbClr val="0F172A">
                 <a:alpha val="13000"/>
               </a:srgbClr>
             </a:outerShdw>
           </a:effectLst>
         </p:spPr>
+        <p:txBody>
+          <a:bodyPr/>
+          <a:lstStyle/>
+          <a:p>
+            <a:endParaRPr lang="en-US"/>
+          </a:p>
+        </p:txBody>
       </p:sp>
       <p:sp>
         <p:nvSpPr>
@@ -3857,7 +3670,7 @@
           <a:bodyPr wrap="square" lIns="0" tIns="0" rIns="0" bIns="0" rtlCol="0" anchor="ctr"/>
           <a:lstStyle/>
           <a:p>
-            <a:pPr algn="ctr" indent="0" marL="0">
+            <a:pPr marL="0" indent="0" algn="ctr">
               <a:buNone/>
             </a:pPr>
             <a:r>
@@ -3896,7 +3709,7 @@
           <a:bodyPr wrap="square" lIns="0" tIns="0" rIns="0" bIns="0" rtlCol="0" anchor="ctr"/>
           <a:lstStyle/>
           <a:p>
-            <a:pPr algn="ctr" indent="0" marL="0">
+            <a:pPr marL="0" indent="0" algn="ctr">
               <a:buNone/>
             </a:pPr>
             <a:r>
@@ -3935,7 +3748,7 @@
           <a:bodyPr wrap="square" lIns="0" tIns="0" rIns="0" bIns="0" rtlCol="0" anchor="ctr"/>
           <a:lstStyle/>
           <a:p>
-            <a:pPr algn="ctr" indent="0" marL="0">
+            <a:pPr marL="0" indent="0" algn="ctr">
               <a:buNone/>
             </a:pPr>
             <a:r>
@@ -3969,6 +3782,7 @@
         <a:solidFill>
           <a:srgbClr val="FFFFFF"/>
         </a:solidFill>
+        <a:effectLst/>
       </p:bgPr>
     </p:bg>
     <p:spTree>
@@ -4006,11 +3820,11 @@
           <a:bodyPr wrap="square" lIns="0" tIns="0" rIns="0" bIns="0" rtlCol="0" anchor="ctr"/>
           <a:lstStyle/>
           <a:p>
-            <a:pPr indent="0" marL="0">
-              <a:buNone/>
-            </a:pPr>
-            <a:r>
-              <a:rPr lang="en-US" sz="1200" b="1" spc="200" kern="0" dirty="0">
+            <a:pPr marL="0" indent="0">
+              <a:buNone/>
+            </a:pPr>
+            <a:r>
+              <a:rPr lang="en-US" sz="1200" b="1" kern="0" spc="200" dirty="0">
                 <a:solidFill>
                   <a:srgbClr val="0F766E"/>
                 </a:solidFill>
@@ -4045,7 +3859,7 @@
           <a:bodyPr wrap="square" lIns="0" tIns="0" rIns="0" bIns="0" rtlCol="0" anchor="ctr"/>
           <a:lstStyle/>
           <a:p>
-            <a:pPr indent="0" marL="0">
+            <a:pPr marL="0" indent="0">
               <a:buNone/>
             </a:pPr>
             <a:r>
@@ -4065,7 +3879,7 @@
       </p:sp>
       <p:graphicFrame>
         <p:nvGraphicFramePr>
-          <p:cNvPr id="4" name="Chart 0" descr=""/>
+          <p:cNvPr id="4" name="Chart 0"/>
           <p:cNvGraphicFramePr/>
           <p:nvPr/>
         </p:nvGraphicFramePr>
@@ -4073,9 +3887,9 @@
           <a:off x="457200" y="1600200"/>
           <a:ext cx="5029200" cy="3108960"/>
         </p:xfrm>
-        <a:graphic xmlns:a="http://schemas.openxmlformats.org/drawingml/2006/main">
+        <a:graphic>
           <a:graphicData uri="http://schemas.openxmlformats.org/drawingml/2006/chart">
-            <c:chart xmlns:c="http://schemas.openxmlformats.org/drawingml/2006/chart" r:id="rId1"/>
+            <c:chart xmlns:c="http://schemas.openxmlformats.org/drawingml/2006/chart" xmlns:r="http://schemas.openxmlformats.org/officeDocument/2006/relationships" r:id="rId3"/>
           </a:graphicData>
         </a:graphic>
       </p:graphicFrame>
@@ -4105,13 +3919,20 @@
             <a:prstDash val="solid"/>
           </a:ln>
           <a:effectLst>
-            <a:outerShdw sx="100000" sy="100000" kx="0" ky="0" algn="bl" rotWithShape="0" blurRad="88900" dist="38100" dir="5400000">
+            <a:outerShdw blurRad="88900" dist="38100" dir="5400000" algn="bl" rotWithShape="0">
               <a:srgbClr val="0F172A">
                 <a:alpha val="13000"/>
               </a:srgbClr>
             </a:outerShdw>
           </a:effectLst>
         </p:spPr>
+        <p:txBody>
+          <a:bodyPr/>
+          <a:lstStyle/>
+          <a:p>
+            <a:endParaRPr lang="en-US"/>
+          </a:p>
+        </p:txBody>
       </p:sp>
       <p:sp>
         <p:nvSpPr>
@@ -4134,7 +3955,7 @@
           <a:bodyPr wrap="square" lIns="0" tIns="0" rIns="0" bIns="0" rtlCol="0" anchor="ctr"/>
           <a:lstStyle/>
           <a:p>
-            <a:pPr algn="ctr" indent="0" marL="0">
+            <a:pPr marL="0" indent="0" algn="ctr">
               <a:buNone/>
             </a:pPr>
             <a:r>
@@ -4173,7 +3994,7 @@
           <a:bodyPr wrap="square" lIns="0" tIns="0" rIns="0" bIns="0" rtlCol="0" anchor="ctr"/>
           <a:lstStyle/>
           <a:p>
-            <a:pPr indent="0" marL="0">
+            <a:pPr marL="0" indent="0">
               <a:buNone/>
             </a:pPr>
             <a:r>
@@ -4217,13 +4038,20 @@
             <a:prstDash val="solid"/>
           </a:ln>
           <a:effectLst>
-            <a:outerShdw sx="100000" sy="100000" kx="0" ky="0" algn="bl" rotWithShape="0" blurRad="88900" dist="38100" dir="5400000">
+            <a:outerShdw blurRad="88900" dist="38100" dir="5400000" algn="bl" rotWithShape="0">
               <a:srgbClr val="0F172A">
                 <a:alpha val="13000"/>
               </a:srgbClr>
             </a:outerShdw>
           </a:effectLst>
         </p:spPr>
+        <p:txBody>
+          <a:bodyPr/>
+          <a:lstStyle/>
+          <a:p>
+            <a:endParaRPr lang="en-US"/>
+          </a:p>
+        </p:txBody>
       </p:sp>
       <p:sp>
         <p:nvSpPr>
@@ -4246,7 +4074,7 @@
           <a:bodyPr wrap="square" lIns="0" tIns="0" rIns="0" bIns="0" rtlCol="0" anchor="ctr"/>
           <a:lstStyle/>
           <a:p>
-            <a:pPr algn="ctr" indent="0" marL="0">
+            <a:pPr marL="0" indent="0" algn="ctr">
               <a:buNone/>
             </a:pPr>
             <a:r>
@@ -4285,7 +4113,7 @@
           <a:bodyPr wrap="square" lIns="0" tIns="0" rIns="0" bIns="0" rtlCol="0" anchor="ctr"/>
           <a:lstStyle/>
           <a:p>
-            <a:pPr indent="0" marL="0">
+            <a:pPr marL="0" indent="0">
               <a:buNone/>
             </a:pPr>
             <a:r>
@@ -4329,13 +4157,20 @@
             <a:prstDash val="solid"/>
           </a:ln>
           <a:effectLst>
-            <a:outerShdw sx="100000" sy="100000" kx="0" ky="0" algn="bl" rotWithShape="0" blurRad="88900" dist="38100" dir="5400000">
+            <a:outerShdw blurRad="88900" dist="38100" dir="5400000" algn="bl" rotWithShape="0">
               <a:srgbClr val="0F172A">
                 <a:alpha val="13000"/>
               </a:srgbClr>
             </a:outerShdw>
           </a:effectLst>
         </p:spPr>
+        <p:txBody>
+          <a:bodyPr/>
+          <a:lstStyle/>
+          <a:p>
+            <a:endParaRPr lang="en-US"/>
+          </a:p>
+        </p:txBody>
       </p:sp>
       <p:sp>
         <p:nvSpPr>
@@ -4358,7 +4193,7 @@
           <a:bodyPr wrap="square" lIns="0" tIns="0" rIns="0" bIns="0" rtlCol="0" anchor="ctr"/>
           <a:lstStyle/>
           <a:p>
-            <a:pPr algn="ctr" indent="0" marL="0">
+            <a:pPr marL="0" indent="0" algn="ctr">
               <a:buNone/>
             </a:pPr>
             <a:r>
@@ -4397,7 +4232,7 @@
           <a:bodyPr wrap="square" lIns="0" tIns="0" rIns="0" bIns="0" rtlCol="0" anchor="ctr"/>
           <a:lstStyle/>
           <a:p>
-            <a:pPr indent="0" marL="0">
+            <a:pPr marL="0" indent="0">
               <a:buNone/>
             </a:pPr>
             <a:r>
@@ -4441,13 +4276,20 @@
             <a:prstDash val="solid"/>
           </a:ln>
           <a:effectLst>
-            <a:outerShdw sx="100000" sy="100000" kx="0" ky="0" algn="bl" rotWithShape="0" blurRad="88900" dist="38100" dir="5400000">
+            <a:outerShdw blurRad="88900" dist="38100" dir="5400000" algn="bl" rotWithShape="0">
               <a:srgbClr val="0F172A">
                 <a:alpha val="13000"/>
               </a:srgbClr>
             </a:outerShdw>
           </a:effectLst>
         </p:spPr>
+        <p:txBody>
+          <a:bodyPr/>
+          <a:lstStyle/>
+          <a:p>
+            <a:endParaRPr lang="en-US"/>
+          </a:p>
+        </p:txBody>
       </p:sp>
       <p:sp>
         <p:nvSpPr>
@@ -4470,7 +4312,7 @@
           <a:bodyPr wrap="square" lIns="0" tIns="0" rIns="0" bIns="0" rtlCol="0" anchor="ctr"/>
           <a:lstStyle/>
           <a:p>
-            <a:pPr algn="ctr" indent="0" marL="0">
+            <a:pPr marL="0" indent="0" algn="ctr">
               <a:buNone/>
             </a:pPr>
             <a:r>
@@ -4509,7 +4351,7 @@
           <a:bodyPr wrap="square" lIns="0" tIns="0" rIns="0" bIns="0" rtlCol="0" anchor="ctr"/>
           <a:lstStyle/>
           <a:p>
-            <a:pPr indent="0" marL="0">
+            <a:pPr marL="0" indent="0">
               <a:buNone/>
             </a:pPr>
             <a:r>
@@ -4543,6 +4385,7 @@
         <a:solidFill>
           <a:srgbClr val="FFFFFF"/>
         </a:solidFill>
+        <a:effectLst/>
       </p:bgPr>
     </p:bg>
     <p:spTree>
@@ -4580,11 +4423,11 @@
           <a:bodyPr wrap="square" lIns="0" tIns="0" rIns="0" bIns="0" rtlCol="0" anchor="ctr"/>
           <a:lstStyle/>
           <a:p>
-            <a:pPr indent="0" marL="0">
-              <a:buNone/>
-            </a:pPr>
-            <a:r>
-              <a:rPr lang="en-US" sz="1200" b="1" spc="200" kern="0" dirty="0">
+            <a:pPr marL="0" indent="0">
+              <a:buNone/>
+            </a:pPr>
+            <a:r>
+              <a:rPr lang="en-US" sz="1200" b="1" kern="0" spc="200" dirty="0">
                 <a:solidFill>
                   <a:srgbClr val="0F766E"/>
                 </a:solidFill>
@@ -4619,7 +4462,7 @@
           <a:bodyPr wrap="square" lIns="0" tIns="0" rIns="0" bIns="0" rtlCol="0" anchor="ctr"/>
           <a:lstStyle/>
           <a:p>
-            <a:pPr indent="0" marL="0">
+            <a:pPr marL="0" indent="0">
               <a:buNone/>
             </a:pPr>
             <a:r>
@@ -4663,13 +4506,20 @@
             <a:prstDash val="solid"/>
           </a:ln>
           <a:effectLst>
-            <a:outerShdw sx="100000" sy="100000" kx="0" ky="0" algn="bl" rotWithShape="0" blurRad="88900" dist="38100" dir="5400000">
+            <a:outerShdw blurRad="88900" dist="38100" dir="5400000" algn="bl" rotWithShape="0">
               <a:srgbClr val="0F172A">
                 <a:alpha val="13000"/>
               </a:srgbClr>
             </a:outerShdw>
           </a:effectLst>
         </p:spPr>
+        <p:txBody>
+          <a:bodyPr/>
+          <a:lstStyle/>
+          <a:p>
+            <a:endParaRPr lang="en-US"/>
+          </a:p>
+        </p:txBody>
       </p:sp>
       <p:sp>
         <p:nvSpPr>
@@ -4692,7 +4542,7 @@
           <a:bodyPr wrap="square" lIns="0" tIns="0" rIns="0" bIns="0" rtlCol="0" anchor="ctr"/>
           <a:lstStyle/>
           <a:p>
-            <a:pPr indent="0" marL="0">
+            <a:pPr marL="0" indent="0">
               <a:buNone/>
             </a:pPr>
             <a:r>
@@ -4731,7 +4581,7 @@
           <a:bodyPr wrap="square" lIns="0" tIns="0" rIns="0" bIns="0" rtlCol="0" anchor="ctr"/>
           <a:lstStyle/>
           <a:p>
-            <a:pPr indent="0" marL="0">
+            <a:pPr marL="0" indent="0">
               <a:buNone/>
             </a:pPr>
             <a:r>
@@ -4775,13 +4625,20 @@
             <a:prstDash val="solid"/>
           </a:ln>
           <a:effectLst>
-            <a:outerShdw sx="100000" sy="100000" kx="0" ky="0" algn="bl" rotWithShape="0" blurRad="88900" dist="38100" dir="5400000">
+            <a:outerShdw blurRad="88900" dist="38100" dir="5400000" algn="bl" rotWithShape="0">
               <a:srgbClr val="0F172A">
                 <a:alpha val="13000"/>
               </a:srgbClr>
             </a:outerShdw>
           </a:effectLst>
         </p:spPr>
+        <p:txBody>
+          <a:bodyPr/>
+          <a:lstStyle/>
+          <a:p>
+            <a:endParaRPr lang="en-US"/>
+          </a:p>
+        </p:txBody>
       </p:sp>
       <p:sp>
         <p:nvSpPr>
@@ -4804,7 +4661,7 @@
           <a:bodyPr wrap="square" lIns="0" tIns="0" rIns="0" bIns="0" rtlCol="0" anchor="ctr"/>
           <a:lstStyle/>
           <a:p>
-            <a:pPr indent="0" marL="0">
+            <a:pPr marL="0" indent="0">
               <a:buNone/>
             </a:pPr>
             <a:r>
@@ -4843,7 +4700,7 @@
           <a:bodyPr wrap="square" lIns="0" tIns="0" rIns="0" bIns="0" rtlCol="0" anchor="ctr"/>
           <a:lstStyle/>
           <a:p>
-            <a:pPr indent="0" marL="0">
+            <a:pPr marL="0" indent="0">
               <a:buNone/>
             </a:pPr>
             <a:r>
@@ -4887,13 +4744,20 @@
             <a:prstDash val="solid"/>
           </a:ln>
           <a:effectLst>
-            <a:outerShdw sx="100000" sy="100000" kx="0" ky="0" algn="bl" rotWithShape="0" blurRad="88900" dist="38100" dir="5400000">
+            <a:outerShdw blurRad="88900" dist="38100" dir="5400000" algn="bl" rotWithShape="0">
               <a:srgbClr val="0F172A">
                 <a:alpha val="13000"/>
               </a:srgbClr>
             </a:outerShdw>
           </a:effectLst>
         </p:spPr>
+        <p:txBody>
+          <a:bodyPr/>
+          <a:lstStyle/>
+          <a:p>
+            <a:endParaRPr lang="en-US"/>
+          </a:p>
+        </p:txBody>
       </p:sp>
       <p:sp>
         <p:nvSpPr>
@@ -4916,7 +4780,7 @@
           <a:bodyPr wrap="square" lIns="0" tIns="0" rIns="0" bIns="0" rtlCol="0" anchor="ctr"/>
           <a:lstStyle/>
           <a:p>
-            <a:pPr indent="0" marL="0">
+            <a:pPr marL="0" indent="0">
               <a:buNone/>
             </a:pPr>
             <a:r>
@@ -4955,7 +4819,7 @@
           <a:bodyPr wrap="square" lIns="0" tIns="0" rIns="0" bIns="0" rtlCol="0" anchor="ctr"/>
           <a:lstStyle/>
           <a:p>
-            <a:pPr indent="0" marL="0">
+            <a:pPr marL="0" indent="0">
               <a:buNone/>
             </a:pPr>
             <a:r>
@@ -4999,13 +4863,20 @@
             <a:prstDash val="solid"/>
           </a:ln>
           <a:effectLst>
-            <a:outerShdw sx="100000" sy="100000" kx="0" ky="0" algn="bl" rotWithShape="0" blurRad="88900" dist="38100" dir="5400000">
+            <a:outerShdw blurRad="88900" dist="38100" dir="5400000" algn="bl" rotWithShape="0">
               <a:srgbClr val="0F172A">
                 <a:alpha val="13000"/>
               </a:srgbClr>
             </a:outerShdw>
           </a:effectLst>
         </p:spPr>
+        <p:txBody>
+          <a:bodyPr/>
+          <a:lstStyle/>
+          <a:p>
+            <a:endParaRPr lang="en-US"/>
+          </a:p>
+        </p:txBody>
       </p:sp>
       <p:sp>
         <p:nvSpPr>
@@ -5028,7 +4899,7 @@
           <a:bodyPr wrap="square" lIns="0" tIns="0" rIns="0" bIns="0" rtlCol="0" anchor="ctr"/>
           <a:lstStyle/>
           <a:p>
-            <a:pPr indent="0" marL="0">
+            <a:pPr marL="0" indent="0">
               <a:buNone/>
             </a:pPr>
             <a:r>
@@ -5067,7 +4938,7 @@
           <a:bodyPr wrap="square" lIns="0" tIns="0" rIns="0" bIns="0" rtlCol="0" anchor="ctr"/>
           <a:lstStyle/>
           <a:p>
-            <a:pPr indent="0" marL="0">
+            <a:pPr marL="0" indent="0">
               <a:buNone/>
             </a:pPr>
             <a:r>
@@ -5111,13 +4982,20 @@
             <a:prstDash val="solid"/>
           </a:ln>
           <a:effectLst>
-            <a:outerShdw sx="100000" sy="100000" kx="0" ky="0" algn="bl" rotWithShape="0" blurRad="88900" dist="38100" dir="5400000">
+            <a:outerShdw blurRad="88900" dist="38100" dir="5400000" algn="bl" rotWithShape="0">
               <a:srgbClr val="0F172A">
                 <a:alpha val="13000"/>
               </a:srgbClr>
             </a:outerShdw>
           </a:effectLst>
         </p:spPr>
+        <p:txBody>
+          <a:bodyPr/>
+          <a:lstStyle/>
+          <a:p>
+            <a:endParaRPr lang="en-US"/>
+          </a:p>
+        </p:txBody>
       </p:sp>
       <p:sp>
         <p:nvSpPr>
@@ -5140,7 +5018,7 @@
           <a:bodyPr wrap="square" lIns="0" tIns="0" rIns="0" bIns="0" rtlCol="0" anchor="ctr"/>
           <a:lstStyle/>
           <a:p>
-            <a:pPr indent="0" marL="0">
+            <a:pPr marL="0" indent="0">
               <a:buNone/>
             </a:pPr>
             <a:r>
@@ -5179,7 +5057,7 @@
           <a:bodyPr wrap="square" lIns="0" tIns="0" rIns="0" bIns="0" rtlCol="0" anchor="ctr"/>
           <a:lstStyle/>
           <a:p>
-            <a:pPr indent="0" marL="0">
+            <a:pPr marL="0" indent="0">
               <a:buNone/>
             </a:pPr>
             <a:r>
@@ -5223,13 +5101,20 @@
             <a:prstDash val="solid"/>
           </a:ln>
           <a:effectLst>
-            <a:outerShdw sx="100000" sy="100000" kx="0" ky="0" algn="bl" rotWithShape="0" blurRad="88900" dist="38100" dir="5400000">
+            <a:outerShdw blurRad="88900" dist="38100" dir="5400000" algn="bl" rotWithShape="0">
               <a:srgbClr val="0F172A">
                 <a:alpha val="13000"/>
               </a:srgbClr>
             </a:outerShdw>
           </a:effectLst>
         </p:spPr>
+        <p:txBody>
+          <a:bodyPr/>
+          <a:lstStyle/>
+          <a:p>
+            <a:endParaRPr lang="en-US"/>
+          </a:p>
+        </p:txBody>
       </p:sp>
       <p:sp>
         <p:nvSpPr>
@@ -5252,7 +5137,7 @@
           <a:bodyPr wrap="square" lIns="0" tIns="0" rIns="0" bIns="0" rtlCol="0" anchor="ctr"/>
           <a:lstStyle/>
           <a:p>
-            <a:pPr indent="0" marL="0">
+            <a:pPr marL="0" indent="0">
               <a:buNone/>
             </a:pPr>
             <a:r>
@@ -5291,7 +5176,7 @@
           <a:bodyPr wrap="square" lIns="0" tIns="0" rIns="0" bIns="0" rtlCol="0" anchor="ctr"/>
           <a:lstStyle/>
           <a:p>
-            <a:pPr indent="0" marL="0">
+            <a:pPr marL="0" indent="0">
               <a:buNone/>
             </a:pPr>
             <a:r>
@@ -5335,13 +5220,20 @@
             <a:prstDash val="solid"/>
           </a:ln>
           <a:effectLst>
-            <a:outerShdw sx="100000" sy="100000" kx="0" ky="0" algn="bl" rotWithShape="0" blurRad="88900" dist="38100" dir="5400000">
+            <a:outerShdw blurRad="88900" dist="38100" dir="5400000" algn="bl" rotWithShape="0">
               <a:srgbClr val="0F172A">
                 <a:alpha val="13000"/>
               </a:srgbClr>
             </a:outerShdw>
           </a:effectLst>
         </p:spPr>
+        <p:txBody>
+          <a:bodyPr/>
+          <a:lstStyle/>
+          <a:p>
+            <a:endParaRPr lang="en-US"/>
+          </a:p>
+        </p:txBody>
       </p:sp>
       <p:sp>
         <p:nvSpPr>
@@ -5364,7 +5256,7 @@
           <a:bodyPr wrap="square" lIns="0" tIns="0" rIns="0" bIns="0" rtlCol="0" anchor="ctr"/>
           <a:lstStyle/>
           <a:p>
-            <a:pPr indent="0" marL="0">
+            <a:pPr marL="0" indent="0">
               <a:buNone/>
             </a:pPr>
             <a:r>
@@ -5403,7 +5295,7 @@
           <a:bodyPr wrap="square" lIns="0" tIns="0" rIns="0" bIns="0" rtlCol="0" anchor="ctr"/>
           <a:lstStyle/>
           <a:p>
-            <a:pPr indent="0" marL="0">
+            <a:pPr marL="0" indent="0">
               <a:buNone/>
             </a:pPr>
             <a:r>
@@ -5442,7 +5334,7 @@
           <a:bodyPr wrap="square" lIns="0" tIns="0" rIns="0" bIns="0" rtlCol="0" anchor="ctr"/>
           <a:lstStyle/>
           <a:p>
-            <a:pPr indent="0" marL="0">
+            <a:pPr marL="0" indent="0">
               <a:buNone/>
             </a:pPr>
             <a:r>
@@ -5456,9 +5348,6 @@
               </a:rPr>
               <a:t>Live on Azure SQL. </a:t>
             </a:r>
-            <a:pPr indent="0" marL="0">
-              <a:buNone/>
-            </a:pPr>
             <a:r>
               <a:rPr lang="en-US" sz="1250" dirty="0">
                 <a:solidFill>
@@ -5490,6 +5379,7 @@
         <a:solidFill>
           <a:srgbClr val="FFFFFF"/>
         </a:solidFill>
+        <a:effectLst/>
       </p:bgPr>
     </p:bg>
     <p:spTree>
@@ -5527,11 +5417,11 @@
           <a:bodyPr wrap="square" lIns="0" tIns="0" rIns="0" bIns="0" rtlCol="0" anchor="ctr"/>
           <a:lstStyle/>
           <a:p>
-            <a:pPr indent="0" marL="0">
-              <a:buNone/>
-            </a:pPr>
-            <a:r>
-              <a:rPr lang="en-US" sz="1200" b="1" spc="200" kern="0" dirty="0">
+            <a:pPr marL="0" indent="0">
+              <a:buNone/>
+            </a:pPr>
+            <a:r>
+              <a:rPr lang="en-US" sz="1200" b="1" kern="0" spc="200" dirty="0">
                 <a:solidFill>
                   <a:srgbClr val="0F766E"/>
                 </a:solidFill>
@@ -5566,7 +5456,7 @@
           <a:bodyPr wrap="square" lIns="0" tIns="0" rIns="0" bIns="0" rtlCol="0" anchor="ctr"/>
           <a:lstStyle/>
           <a:p>
-            <a:pPr indent="0" marL="0">
+            <a:pPr marL="0" indent="0">
               <a:buNone/>
             </a:pPr>
             <a:r>
@@ -5610,13 +5500,20 @@
             <a:prstDash val="solid"/>
           </a:ln>
           <a:effectLst>
-            <a:outerShdw sx="100000" sy="100000" kx="0" ky="0" algn="bl" rotWithShape="0" blurRad="88900" dist="38100" dir="5400000">
+            <a:outerShdw blurRad="88900" dist="38100" dir="5400000" algn="bl" rotWithShape="0">
               <a:srgbClr val="0F172A">
                 <a:alpha val="13000"/>
               </a:srgbClr>
             </a:outerShdw>
           </a:effectLst>
         </p:spPr>
+        <p:txBody>
+          <a:bodyPr/>
+          <a:lstStyle/>
+          <a:p>
+            <a:endParaRPr lang="en-US"/>
+          </a:p>
+        </p:txBody>
       </p:sp>
       <p:sp>
         <p:nvSpPr>
@@ -5639,7 +5536,7 @@
           <a:bodyPr wrap="square" lIns="0" tIns="0" rIns="0" bIns="0" rtlCol="0" anchor="ctr"/>
           <a:lstStyle/>
           <a:p>
-            <a:pPr indent="0" marL="0">
+            <a:pPr marL="0" indent="0">
               <a:buNone/>
             </a:pPr>
             <a:r>
@@ -5678,7 +5575,7 @@
           <a:bodyPr wrap="square" lIns="0" tIns="0" rIns="0" bIns="0" rtlCol="0" anchor="ctr"/>
           <a:lstStyle/>
           <a:p>
-            <a:pPr indent="0" marL="0">
+            <a:pPr marL="0" indent="0">
               <a:buNone/>
             </a:pPr>
             <a:r>
@@ -5722,13 +5619,20 @@
             <a:prstDash val="solid"/>
           </a:ln>
           <a:effectLst>
-            <a:outerShdw sx="100000" sy="100000" kx="0" ky="0" algn="bl" rotWithShape="0" blurRad="88900" dist="38100" dir="5400000">
+            <a:outerShdw blurRad="88900" dist="38100" dir="5400000" algn="bl" rotWithShape="0">
               <a:srgbClr val="0F172A">
                 <a:alpha val="13000"/>
               </a:srgbClr>
             </a:outerShdw>
           </a:effectLst>
         </p:spPr>
+        <p:txBody>
+          <a:bodyPr/>
+          <a:lstStyle/>
+          <a:p>
+            <a:endParaRPr lang="en-US"/>
+          </a:p>
+        </p:txBody>
       </p:sp>
       <p:sp>
         <p:nvSpPr>
@@ -5751,7 +5655,7 @@
           <a:bodyPr wrap="square" lIns="0" tIns="0" rIns="0" bIns="0" rtlCol="0" anchor="ctr"/>
           <a:lstStyle/>
           <a:p>
-            <a:pPr indent="0" marL="0">
+            <a:pPr marL="0" indent="0">
               <a:buNone/>
             </a:pPr>
             <a:r>
@@ -5790,7 +5694,7 @@
           <a:bodyPr wrap="square" lIns="0" tIns="0" rIns="0" bIns="0" rtlCol="0" anchor="ctr"/>
           <a:lstStyle/>
           <a:p>
-            <a:pPr indent="0" marL="0">
+            <a:pPr marL="0" indent="0">
               <a:buNone/>
             </a:pPr>
             <a:r>
@@ -5834,13 +5738,20 @@
             <a:prstDash val="solid"/>
           </a:ln>
           <a:effectLst>
-            <a:outerShdw sx="100000" sy="100000" kx="0" ky="0" algn="bl" rotWithShape="0" blurRad="88900" dist="38100" dir="5400000">
+            <a:outerShdw blurRad="88900" dist="38100" dir="5400000" algn="bl" rotWithShape="0">
               <a:srgbClr val="0F172A">
                 <a:alpha val="13000"/>
               </a:srgbClr>
             </a:outerShdw>
           </a:effectLst>
         </p:spPr>
+        <p:txBody>
+          <a:bodyPr/>
+          <a:lstStyle/>
+          <a:p>
+            <a:endParaRPr lang="en-US"/>
+          </a:p>
+        </p:txBody>
       </p:sp>
       <p:sp>
         <p:nvSpPr>
@@ -5863,7 +5774,7 @@
           <a:bodyPr wrap="square" lIns="0" tIns="0" rIns="0" bIns="0" rtlCol="0" anchor="ctr"/>
           <a:lstStyle/>
           <a:p>
-            <a:pPr indent="0" marL="0">
+            <a:pPr marL="0" indent="0">
               <a:buNone/>
             </a:pPr>
             <a:r>
@@ -5902,7 +5813,7 @@
           <a:bodyPr wrap="square" lIns="0" tIns="0" rIns="0" bIns="0" rtlCol="0" anchor="ctr"/>
           <a:lstStyle/>
           <a:p>
-            <a:pPr indent="0" marL="0">
+            <a:pPr marL="0" indent="0">
               <a:buNone/>
             </a:pPr>
             <a:r>
@@ -5946,13 +5857,20 @@
             <a:prstDash val="solid"/>
           </a:ln>
           <a:effectLst>
-            <a:outerShdw sx="100000" sy="100000" kx="0" ky="0" algn="bl" rotWithShape="0" blurRad="88900" dist="38100" dir="5400000">
+            <a:outerShdw blurRad="88900" dist="38100" dir="5400000" algn="bl" rotWithShape="0">
               <a:srgbClr val="0F172A">
                 <a:alpha val="13000"/>
               </a:srgbClr>
             </a:outerShdw>
           </a:effectLst>
         </p:spPr>
+        <p:txBody>
+          <a:bodyPr/>
+          <a:lstStyle/>
+          <a:p>
+            <a:endParaRPr lang="en-US"/>
+          </a:p>
+        </p:txBody>
       </p:sp>
       <p:sp>
         <p:nvSpPr>
@@ -5975,7 +5893,7 @@
           <a:bodyPr wrap="square" lIns="0" tIns="0" rIns="0" bIns="0" rtlCol="0" anchor="ctr"/>
           <a:lstStyle/>
           <a:p>
-            <a:pPr indent="0" marL="0">
+            <a:pPr marL="0" indent="0">
               <a:buNone/>
             </a:pPr>
             <a:r>
@@ -6014,7 +5932,7 @@
           <a:bodyPr wrap="square" lIns="0" tIns="0" rIns="0" bIns="0" rtlCol="0" anchor="ctr"/>
           <a:lstStyle/>
           <a:p>
-            <a:pPr indent="0" marL="0">
+            <a:pPr marL="0" indent="0">
               <a:buNone/>
             </a:pPr>
             <a:r>
@@ -6058,13 +5976,20 @@
             <a:prstDash val="solid"/>
           </a:ln>
           <a:effectLst>
-            <a:outerShdw sx="100000" sy="100000" kx="0" ky="0" algn="bl" rotWithShape="0" blurRad="88900" dist="38100" dir="5400000">
+            <a:outerShdw blurRad="88900" dist="38100" dir="5400000" algn="bl" rotWithShape="0">
               <a:srgbClr val="0F172A">
                 <a:alpha val="13000"/>
               </a:srgbClr>
             </a:outerShdw>
           </a:effectLst>
         </p:spPr>
+        <p:txBody>
+          <a:bodyPr/>
+          <a:lstStyle/>
+          <a:p>
+            <a:endParaRPr lang="en-US"/>
+          </a:p>
+        </p:txBody>
       </p:sp>
       <p:sp>
         <p:nvSpPr>
@@ -6087,7 +6012,7 @@
           <a:bodyPr wrap="square" lIns="0" tIns="0" rIns="0" bIns="0" rtlCol="0" anchor="ctr"/>
           <a:lstStyle/>
           <a:p>
-            <a:pPr indent="0" marL="0">
+            <a:pPr marL="0" indent="0">
               <a:buNone/>
             </a:pPr>
             <a:r>
@@ -6126,7 +6051,7 @@
           <a:bodyPr wrap="square" lIns="0" tIns="0" rIns="0" bIns="0" rtlCol="0" anchor="ctr"/>
           <a:lstStyle/>
           <a:p>
-            <a:pPr indent="0" marL="0">
+            <a:pPr marL="0" indent="0">
               <a:buNone/>
             </a:pPr>
             <a:r>
@@ -6170,13 +6095,20 @@
             <a:prstDash val="solid"/>
           </a:ln>
           <a:effectLst>
-            <a:outerShdw sx="100000" sy="100000" kx="0" ky="0" algn="bl" rotWithShape="0" blurRad="88900" dist="38100" dir="5400000">
+            <a:outerShdw blurRad="88900" dist="38100" dir="5400000" algn="bl" rotWithShape="0">
               <a:srgbClr val="0F172A">
                 <a:alpha val="13000"/>
               </a:srgbClr>
             </a:outerShdw>
           </a:effectLst>
         </p:spPr>
+        <p:txBody>
+          <a:bodyPr/>
+          <a:lstStyle/>
+          <a:p>
+            <a:endParaRPr lang="en-US"/>
+          </a:p>
+        </p:txBody>
       </p:sp>
       <p:sp>
         <p:nvSpPr>
@@ -6199,7 +6131,7 @@
           <a:bodyPr wrap="square" lIns="0" tIns="0" rIns="0" bIns="0" rtlCol="0" anchor="ctr"/>
           <a:lstStyle/>
           <a:p>
-            <a:pPr indent="0" marL="0">
+            <a:pPr marL="0" indent="0">
               <a:buNone/>
             </a:pPr>
             <a:r>
@@ -6238,7 +6170,7 @@
           <a:bodyPr wrap="square" lIns="0" tIns="0" rIns="0" bIns="0" rtlCol="0" anchor="ctr"/>
           <a:lstStyle/>
           <a:p>
-            <a:pPr indent="0" marL="0">
+            <a:pPr marL="0" indent="0">
               <a:buNone/>
             </a:pPr>
             <a:r>
@@ -6277,7 +6209,7 @@
           <a:bodyPr wrap="square" lIns="0" tIns="0" rIns="0" bIns="0" rtlCol="0" anchor="ctr"/>
           <a:lstStyle/>
           <a:p>
-            <a:pPr algn="ctr" indent="0" marL="0">
+            <a:pPr marL="0" indent="0" algn="ctr">
               <a:buNone/>
             </a:pPr>
             <a:r>
@@ -6311,6 +6243,7 @@
         <a:solidFill>
           <a:srgbClr val="FFFFFF"/>
         </a:solidFill>
+        <a:effectLst/>
       </p:bgPr>
     </p:bg>
     <p:spTree>
@@ -6348,11 +6281,11 @@
           <a:bodyPr wrap="square" lIns="0" tIns="0" rIns="0" bIns="0" rtlCol="0" anchor="ctr"/>
           <a:lstStyle/>
           <a:p>
-            <a:pPr indent="0" marL="0">
-              <a:buNone/>
-            </a:pPr>
-            <a:r>
-              <a:rPr lang="en-US" sz="1200" b="1" spc="200" kern="0" dirty="0">
+            <a:pPr marL="0" indent="0">
+              <a:buNone/>
+            </a:pPr>
+            <a:r>
+              <a:rPr lang="en-US" sz="1200" b="1" kern="0" spc="200" dirty="0">
                 <a:solidFill>
                   <a:srgbClr val="0F766E"/>
                 </a:solidFill>
@@ -6387,7 +6320,7 @@
           <a:bodyPr wrap="square" lIns="0" tIns="0" rIns="0" bIns="0" rtlCol="0" anchor="ctr"/>
           <a:lstStyle/>
           <a:p>
-            <a:pPr indent="0" marL="0">
+            <a:pPr marL="0" indent="0">
               <a:buNone/>
             </a:pPr>
             <a:r>
@@ -6431,13 +6364,20 @@
             <a:prstDash val="solid"/>
           </a:ln>
           <a:effectLst>
-            <a:outerShdw sx="100000" sy="100000" kx="0" ky="0" algn="bl" rotWithShape="0" blurRad="88900" dist="38100" dir="5400000">
+            <a:outerShdw blurRad="88900" dist="38100" dir="5400000" algn="bl" rotWithShape="0">
               <a:srgbClr val="0F172A">
                 <a:alpha val="13000"/>
               </a:srgbClr>
             </a:outerShdw>
           </a:effectLst>
         </p:spPr>
+        <p:txBody>
+          <a:bodyPr/>
+          <a:lstStyle/>
+          <a:p>
+            <a:endParaRPr lang="en-US"/>
+          </a:p>
+        </p:txBody>
       </p:sp>
       <p:sp>
         <p:nvSpPr>
@@ -6458,6 +6398,13 @@
           </a:solidFill>
           <a:ln/>
         </p:spPr>
+        <p:txBody>
+          <a:bodyPr/>
+          <a:lstStyle/>
+          <a:p>
+            <a:endParaRPr lang="en-US"/>
+          </a:p>
+        </p:txBody>
       </p:sp>
       <p:sp>
         <p:nvSpPr>
@@ -6480,7 +6427,7 @@
           <a:bodyPr wrap="square" lIns="0" tIns="0" rIns="0" bIns="0" rtlCol="0" anchor="ctr"/>
           <a:lstStyle/>
           <a:p>
-            <a:pPr algn="ctr" indent="0" marL="0">
+            <a:pPr marL="0" indent="0" algn="ctr">
               <a:buNone/>
             </a:pPr>
             <a:r>
@@ -6516,7 +6463,7 @@
           <a:bodyPr wrap="square" lIns="0" tIns="0" rIns="0" bIns="0" rtlCol="0" anchor="ctr"/>
           <a:lstStyle/>
           <a:p>
-            <a:pPr indent="0" marL="0">
+            <a:pPr marL="0" indent="0">
               <a:buNone/>
             </a:pPr>
             <a:r>
@@ -6555,7 +6502,7 @@
           <a:bodyPr wrap="square" lIns="0" tIns="0" rIns="0" bIns="0" rtlCol="0" anchor="ctr"/>
           <a:lstStyle/>
           <a:p>
-            <a:pPr indent="0" marL="0">
+            <a:pPr marL="0" indent="0">
               <a:buNone/>
             </a:pPr>
             <a:r>
@@ -6599,13 +6546,20 @@
             <a:prstDash val="solid"/>
           </a:ln>
           <a:effectLst>
-            <a:outerShdw sx="100000" sy="100000" kx="0" ky="0" algn="bl" rotWithShape="0" blurRad="88900" dist="38100" dir="5400000">
+            <a:outerShdw blurRad="88900" dist="38100" dir="5400000" algn="bl" rotWithShape="0">
               <a:srgbClr val="0F172A">
                 <a:alpha val="13000"/>
               </a:srgbClr>
             </a:outerShdw>
           </a:effectLst>
         </p:spPr>
+        <p:txBody>
+          <a:bodyPr/>
+          <a:lstStyle/>
+          <a:p>
+            <a:endParaRPr lang="en-US"/>
+          </a:p>
+        </p:txBody>
       </p:sp>
       <p:sp>
         <p:nvSpPr>
@@ -6626,6 +6580,13 @@
           </a:solidFill>
           <a:ln/>
         </p:spPr>
+        <p:txBody>
+          <a:bodyPr/>
+          <a:lstStyle/>
+          <a:p>
+            <a:endParaRPr lang="en-US"/>
+          </a:p>
+        </p:txBody>
       </p:sp>
       <p:sp>
         <p:nvSpPr>
@@ -6648,7 +6609,7 @@
           <a:bodyPr wrap="square" lIns="0" tIns="0" rIns="0" bIns="0" rtlCol="0" anchor="ctr"/>
           <a:lstStyle/>
           <a:p>
-            <a:pPr algn="ctr" indent="0" marL="0">
+            <a:pPr marL="0" indent="0" algn="ctr">
               <a:buNone/>
             </a:pPr>
             <a:r>
@@ -6684,7 +6645,7 @@
           <a:bodyPr wrap="square" lIns="0" tIns="0" rIns="0" bIns="0" rtlCol="0" anchor="ctr"/>
           <a:lstStyle/>
           <a:p>
-            <a:pPr indent="0" marL="0">
+            <a:pPr marL="0" indent="0">
               <a:buNone/>
             </a:pPr>
             <a:r>
@@ -6723,7 +6684,7 @@
           <a:bodyPr wrap="square" lIns="0" tIns="0" rIns="0" bIns="0" rtlCol="0" anchor="ctr"/>
           <a:lstStyle/>
           <a:p>
-            <a:pPr indent="0" marL="0">
+            <a:pPr marL="0" indent="0">
               <a:buNone/>
             </a:pPr>
             <a:r>
@@ -6767,13 +6728,20 @@
             <a:prstDash val="solid"/>
           </a:ln>
           <a:effectLst>
-            <a:outerShdw sx="100000" sy="100000" kx="0" ky="0" algn="bl" rotWithShape="0" blurRad="88900" dist="38100" dir="5400000">
+            <a:outerShdw blurRad="88900" dist="38100" dir="5400000" algn="bl" rotWithShape="0">
               <a:srgbClr val="0F172A">
                 <a:alpha val="13000"/>
               </a:srgbClr>
             </a:outerShdw>
           </a:effectLst>
         </p:spPr>
+        <p:txBody>
+          <a:bodyPr/>
+          <a:lstStyle/>
+          <a:p>
+            <a:endParaRPr lang="en-US"/>
+          </a:p>
+        </p:txBody>
       </p:sp>
       <p:sp>
         <p:nvSpPr>
@@ -6794,6 +6762,13 @@
           </a:solidFill>
           <a:ln/>
         </p:spPr>
+        <p:txBody>
+          <a:bodyPr/>
+          <a:lstStyle/>
+          <a:p>
+            <a:endParaRPr lang="en-US"/>
+          </a:p>
+        </p:txBody>
       </p:sp>
       <p:sp>
         <p:nvSpPr>
@@ -6816,7 +6791,7 @@
           <a:bodyPr wrap="square" lIns="0" tIns="0" rIns="0" bIns="0" rtlCol="0" anchor="ctr"/>
           <a:lstStyle/>
           <a:p>
-            <a:pPr algn="ctr" indent="0" marL="0">
+            <a:pPr marL="0" indent="0" algn="ctr">
               <a:buNone/>
             </a:pPr>
             <a:r>
@@ -6852,7 +6827,7 @@
           <a:bodyPr wrap="square" lIns="0" tIns="0" rIns="0" bIns="0" rtlCol="0" anchor="ctr"/>
           <a:lstStyle/>
           <a:p>
-            <a:pPr indent="0" marL="0">
+            <a:pPr marL="0" indent="0">
               <a:buNone/>
             </a:pPr>
             <a:r>
@@ -6891,7 +6866,7 @@
           <a:bodyPr wrap="square" lIns="0" tIns="0" rIns="0" bIns="0" rtlCol="0" anchor="ctr"/>
           <a:lstStyle/>
           <a:p>
-            <a:pPr indent="0" marL="0">
+            <a:pPr marL="0" indent="0">
               <a:buNone/>
             </a:pPr>
             <a:r>
@@ -6935,13 +6910,20 @@
             <a:prstDash val="solid"/>
           </a:ln>
           <a:effectLst>
-            <a:outerShdw sx="100000" sy="100000" kx="0" ky="0" algn="bl" rotWithShape="0" blurRad="88900" dist="38100" dir="5400000">
+            <a:outerShdw blurRad="88900" dist="38100" dir="5400000" algn="bl" rotWithShape="0">
               <a:srgbClr val="0F172A">
                 <a:alpha val="13000"/>
               </a:srgbClr>
             </a:outerShdw>
           </a:effectLst>
         </p:spPr>
+        <p:txBody>
+          <a:bodyPr/>
+          <a:lstStyle/>
+          <a:p>
+            <a:endParaRPr lang="en-US"/>
+          </a:p>
+        </p:txBody>
       </p:sp>
       <p:sp>
         <p:nvSpPr>
@@ -6962,6 +6944,13 @@
           </a:solidFill>
           <a:ln/>
         </p:spPr>
+        <p:txBody>
+          <a:bodyPr/>
+          <a:lstStyle/>
+          <a:p>
+            <a:endParaRPr lang="en-US"/>
+          </a:p>
+        </p:txBody>
       </p:sp>
       <p:sp>
         <p:nvSpPr>
@@ -6984,7 +6973,7 @@
           <a:bodyPr wrap="square" lIns="0" tIns="0" rIns="0" bIns="0" rtlCol="0" anchor="ctr"/>
           <a:lstStyle/>
           <a:p>
-            <a:pPr algn="ctr" indent="0" marL="0">
+            <a:pPr marL="0" indent="0" algn="ctr">
               <a:buNone/>
             </a:pPr>
             <a:r>
@@ -7020,7 +7009,7 @@
           <a:bodyPr wrap="square" lIns="0" tIns="0" rIns="0" bIns="0" rtlCol="0" anchor="ctr"/>
           <a:lstStyle/>
           <a:p>
-            <a:pPr indent="0" marL="0">
+            <a:pPr marL="0" indent="0">
               <a:buNone/>
             </a:pPr>
             <a:r>
@@ -7059,7 +7048,7 @@
           <a:bodyPr wrap="square" lIns="0" tIns="0" rIns="0" bIns="0" rtlCol="0" anchor="ctr"/>
           <a:lstStyle/>
           <a:p>
-            <a:pPr indent="0" marL="0">
+            <a:pPr marL="0" indent="0">
               <a:buNone/>
             </a:pPr>
             <a:r>
@@ -7103,13 +7092,20 @@
             <a:prstDash val="solid"/>
           </a:ln>
           <a:effectLst>
-            <a:outerShdw sx="100000" sy="100000" kx="0" ky="0" algn="bl" rotWithShape="0" blurRad="88900" dist="38100" dir="5400000">
+            <a:outerShdw blurRad="88900" dist="38100" dir="5400000" algn="bl" rotWithShape="0">
               <a:srgbClr val="0F172A">
                 <a:alpha val="13000"/>
               </a:srgbClr>
             </a:outerShdw>
           </a:effectLst>
         </p:spPr>
+        <p:txBody>
+          <a:bodyPr/>
+          <a:lstStyle/>
+          <a:p>
+            <a:endParaRPr lang="en-US"/>
+          </a:p>
+        </p:txBody>
       </p:sp>
       <p:sp>
         <p:nvSpPr>
@@ -7130,6 +7126,13 @@
           </a:solidFill>
           <a:ln/>
         </p:spPr>
+        <p:txBody>
+          <a:bodyPr/>
+          <a:lstStyle/>
+          <a:p>
+            <a:endParaRPr lang="en-US"/>
+          </a:p>
+        </p:txBody>
       </p:sp>
       <p:sp>
         <p:nvSpPr>
@@ -7152,7 +7155,7 @@
           <a:bodyPr wrap="square" lIns="0" tIns="0" rIns="0" bIns="0" rtlCol="0" anchor="ctr"/>
           <a:lstStyle/>
           <a:p>
-            <a:pPr algn="ctr" indent="0" marL="0">
+            <a:pPr marL="0" indent="0" algn="ctr">
               <a:buNone/>
             </a:pPr>
             <a:r>
@@ -7188,7 +7191,7 @@
           <a:bodyPr wrap="square" lIns="0" tIns="0" rIns="0" bIns="0" rtlCol="0" anchor="ctr"/>
           <a:lstStyle/>
           <a:p>
-            <a:pPr indent="0" marL="0">
+            <a:pPr marL="0" indent="0">
               <a:buNone/>
             </a:pPr>
             <a:r>
@@ -7227,7 +7230,7 @@
           <a:bodyPr wrap="square" lIns="0" tIns="0" rIns="0" bIns="0" rtlCol="0" anchor="ctr"/>
           <a:lstStyle/>
           <a:p>
-            <a:pPr indent="0" marL="0">
+            <a:pPr marL="0" indent="0">
               <a:buNone/>
             </a:pPr>
             <a:r>
@@ -7271,13 +7274,20 @@
             <a:prstDash val="solid"/>
           </a:ln>
           <a:effectLst>
-            <a:outerShdw sx="100000" sy="100000" kx="0" ky="0" algn="bl" rotWithShape="0" blurRad="88900" dist="38100" dir="5400000">
+            <a:outerShdw blurRad="88900" dist="38100" dir="5400000" algn="bl" rotWithShape="0">
               <a:srgbClr val="0F172A">
                 <a:alpha val="13000"/>
               </a:srgbClr>
             </a:outerShdw>
           </a:effectLst>
         </p:spPr>
+        <p:txBody>
+          <a:bodyPr/>
+          <a:lstStyle/>
+          <a:p>
+            <a:endParaRPr lang="en-US"/>
+          </a:p>
+        </p:txBody>
       </p:sp>
       <p:sp>
         <p:nvSpPr>
@@ -7298,6 +7308,13 @@
           </a:solidFill>
           <a:ln/>
         </p:spPr>
+        <p:txBody>
+          <a:bodyPr/>
+          <a:lstStyle/>
+          <a:p>
+            <a:endParaRPr lang="en-US"/>
+          </a:p>
+        </p:txBody>
       </p:sp>
       <p:sp>
         <p:nvSpPr>
@@ -7320,7 +7337,7 @@
           <a:bodyPr wrap="square" lIns="0" tIns="0" rIns="0" bIns="0" rtlCol="0" anchor="ctr"/>
           <a:lstStyle/>
           <a:p>
-            <a:pPr algn="ctr" indent="0" marL="0">
+            <a:pPr marL="0" indent="0" algn="ctr">
               <a:buNone/>
             </a:pPr>
             <a:r>
@@ -7356,7 +7373,7 @@
           <a:bodyPr wrap="square" lIns="0" tIns="0" rIns="0" bIns="0" rtlCol="0" anchor="ctr"/>
           <a:lstStyle/>
           <a:p>
-            <a:pPr indent="0" marL="0">
+            <a:pPr marL="0" indent="0">
               <a:buNone/>
             </a:pPr>
             <a:r>
@@ -7395,7 +7412,7 @@
           <a:bodyPr wrap="square" lIns="0" tIns="0" rIns="0" bIns="0" rtlCol="0" anchor="ctr"/>
           <a:lstStyle/>
           <a:p>
-            <a:pPr indent="0" marL="0">
+            <a:pPr marL="0" indent="0">
               <a:buNone/>
             </a:pPr>
             <a:r>
@@ -7429,6 +7446,7 @@
         <a:solidFill>
           <a:srgbClr val="FFFFFF"/>
         </a:solidFill>
+        <a:effectLst/>
       </p:bgPr>
     </p:bg>
     <p:spTree>
@@ -7466,11 +7484,11 @@
           <a:bodyPr wrap="square" lIns="0" tIns="0" rIns="0" bIns="0" rtlCol="0" anchor="ctr"/>
           <a:lstStyle/>
           <a:p>
-            <a:pPr indent="0" marL="0">
-              <a:buNone/>
-            </a:pPr>
-            <a:r>
-              <a:rPr lang="en-US" sz="1200" b="1" spc="200" kern="0" dirty="0">
+            <a:pPr marL="0" indent="0">
+              <a:buNone/>
+            </a:pPr>
+            <a:r>
+              <a:rPr lang="en-US" sz="1200" b="1" kern="0" spc="200" dirty="0">
                 <a:solidFill>
                   <a:srgbClr val="0F766E"/>
                 </a:solidFill>
@@ -7505,7 +7523,7 @@
           <a:bodyPr wrap="square" lIns="0" tIns="0" rIns="0" bIns="0" rtlCol="0" anchor="ctr"/>
           <a:lstStyle/>
           <a:p>
-            <a:pPr indent="0" marL="0">
+            <a:pPr marL="0" indent="0">
               <a:buNone/>
             </a:pPr>
             <a:r>
@@ -7549,13 +7567,20 @@
             <a:prstDash val="solid"/>
           </a:ln>
           <a:effectLst>
-            <a:outerShdw sx="100000" sy="100000" kx="0" ky="0" algn="bl" rotWithShape="0" blurRad="88900" dist="38100" dir="5400000">
+            <a:outerShdw blurRad="88900" dist="38100" dir="5400000" algn="bl" rotWithShape="0">
               <a:srgbClr val="0F172A">
                 <a:alpha val="13000"/>
               </a:srgbClr>
             </a:outerShdw>
           </a:effectLst>
         </p:spPr>
+        <p:txBody>
+          <a:bodyPr/>
+          <a:lstStyle/>
+          <a:p>
+            <a:endParaRPr lang="en-US"/>
+          </a:p>
+        </p:txBody>
       </p:sp>
       <p:sp>
         <p:nvSpPr>
@@ -7578,7 +7603,7 @@
           <a:bodyPr wrap="square" lIns="0" tIns="0" rIns="0" bIns="0" rtlCol="0" anchor="ctr"/>
           <a:lstStyle/>
           <a:p>
-            <a:pPr indent="0" marL="0">
+            <a:pPr marL="0" indent="0">
               <a:buNone/>
             </a:pPr>
             <a:r>
@@ -7617,7 +7642,7 @@
           <a:bodyPr wrap="square" lIns="0" tIns="0" rIns="0" bIns="0" rtlCol="0" anchor="ctr"/>
           <a:lstStyle/>
           <a:p>
-            <a:pPr indent="0" marL="0">
+            <a:pPr marL="0" indent="0">
               <a:buNone/>
             </a:pPr>
             <a:r>
@@ -7661,13 +7686,20 @@
             <a:prstDash val="solid"/>
           </a:ln>
           <a:effectLst>
-            <a:outerShdw sx="100000" sy="100000" kx="0" ky="0" algn="bl" rotWithShape="0" blurRad="88900" dist="38100" dir="5400000">
+            <a:outerShdw blurRad="88900" dist="38100" dir="5400000" algn="bl" rotWithShape="0">
               <a:srgbClr val="0F172A">
                 <a:alpha val="13000"/>
               </a:srgbClr>
             </a:outerShdw>
           </a:effectLst>
         </p:spPr>
+        <p:txBody>
+          <a:bodyPr/>
+          <a:lstStyle/>
+          <a:p>
+            <a:endParaRPr lang="en-US"/>
+          </a:p>
+        </p:txBody>
       </p:sp>
       <p:sp>
         <p:nvSpPr>
@@ -7690,7 +7722,7 @@
           <a:bodyPr wrap="square" lIns="0" tIns="0" rIns="0" bIns="0" rtlCol="0" anchor="ctr"/>
           <a:lstStyle/>
           <a:p>
-            <a:pPr indent="0" marL="0">
+            <a:pPr marL="0" indent="0">
               <a:buNone/>
             </a:pPr>
             <a:r>
@@ -7729,7 +7761,7 @@
           <a:bodyPr wrap="square" lIns="0" tIns="0" rIns="0" bIns="0" rtlCol="0" anchor="ctr"/>
           <a:lstStyle/>
           <a:p>
-            <a:pPr indent="0" marL="0">
+            <a:pPr marL="0" indent="0">
               <a:buNone/>
             </a:pPr>
             <a:r>
@@ -7773,13 +7805,20 @@
             <a:prstDash val="solid"/>
           </a:ln>
           <a:effectLst>
-            <a:outerShdw sx="100000" sy="100000" kx="0" ky="0" algn="bl" rotWithShape="0" blurRad="88900" dist="38100" dir="5400000">
+            <a:outerShdw blurRad="88900" dist="38100" dir="5400000" algn="bl" rotWithShape="0">
               <a:srgbClr val="0F172A">
                 <a:alpha val="13000"/>
               </a:srgbClr>
             </a:outerShdw>
           </a:effectLst>
         </p:spPr>
+        <p:txBody>
+          <a:bodyPr/>
+          <a:lstStyle/>
+          <a:p>
+            <a:endParaRPr lang="en-US"/>
+          </a:p>
+        </p:txBody>
       </p:sp>
       <p:sp>
         <p:nvSpPr>
@@ -7802,7 +7841,7 @@
           <a:bodyPr wrap="square" lIns="0" tIns="0" rIns="0" bIns="0" rtlCol="0" anchor="ctr"/>
           <a:lstStyle/>
           <a:p>
-            <a:pPr indent="0" marL="0">
+            <a:pPr marL="0" indent="0">
               <a:buNone/>
             </a:pPr>
             <a:r>
@@ -7841,7 +7880,7 @@
           <a:bodyPr wrap="square" lIns="0" tIns="0" rIns="0" bIns="0" rtlCol="0" anchor="ctr"/>
           <a:lstStyle/>
           <a:p>
-            <a:pPr indent="0" marL="0">
+            <a:pPr marL="0" indent="0">
               <a:buNone/>
             </a:pPr>
             <a:r>
@@ -7880,7 +7919,7 @@
           <a:bodyPr wrap="square" lIns="0" tIns="0" rIns="0" bIns="0" rtlCol="0" anchor="ctr"/>
           <a:lstStyle/>
           <a:p>
-            <a:pPr algn="ctr" indent="0" marL="0">
+            <a:pPr marL="0" indent="0" algn="ctr">
               <a:buNone/>
             </a:pPr>
             <a:r>
@@ -7914,6 +7953,7 @@
         <a:solidFill>
           <a:srgbClr val="0B3B39"/>
         </a:solidFill>
+        <a:effectLst/>
       </p:bgPr>
     </p:bg>
     <p:spTree>
@@ -7958,6 +7998,13 @@
             <a:prstDash val="solid"/>
           </a:ln>
         </p:spPr>
+        <p:txBody>
+          <a:bodyPr/>
+          <a:lstStyle/>
+          <a:p>
+            <a:endParaRPr lang="en-US"/>
+          </a:p>
+        </p:txBody>
       </p:sp>
       <p:sp>
         <p:nvSpPr>
@@ -7987,6 +8034,13 @@
             <a:prstDash val="solid"/>
           </a:ln>
         </p:spPr>
+        <p:txBody>
+          <a:bodyPr/>
+          <a:lstStyle/>
+          <a:p>
+            <a:endParaRPr lang="en-US"/>
+          </a:p>
+        </p:txBody>
       </p:sp>
       <p:sp>
         <p:nvSpPr>
@@ -8016,6 +8070,13 @@
             <a:prstDash val="solid"/>
           </a:ln>
         </p:spPr>
+        <p:txBody>
+          <a:bodyPr/>
+          <a:lstStyle/>
+          <a:p>
+            <a:endParaRPr lang="en-US"/>
+          </a:p>
+        </p:txBody>
       </p:sp>
       <p:sp>
         <p:nvSpPr>
@@ -8038,11 +8099,11 @@
           <a:bodyPr wrap="square" lIns="0" tIns="0" rIns="0" bIns="0" rtlCol="0" anchor="ctr"/>
           <a:lstStyle/>
           <a:p>
-            <a:pPr indent="0" marL="0">
-              <a:buNone/>
-            </a:pPr>
-            <a:r>
-              <a:rPr lang="en-US" sz="1400" b="1" spc="300" kern="0" dirty="0">
+            <a:pPr marL="0" indent="0">
+              <a:buNone/>
+            </a:pPr>
+            <a:r>
+              <a:rPr lang="en-US" sz="1400" b="1" kern="0" spc="300" dirty="0">
                 <a:solidFill>
                   <a:srgbClr val="5EEAD4"/>
                 </a:solidFill>
@@ -8077,7 +8138,7 @@
           <a:bodyPr wrap="square" lIns="0" tIns="0" rIns="0" bIns="0" rtlCol="0" anchor="ctr"/>
           <a:lstStyle/>
           <a:p>
-            <a:pPr indent="0" marL="0">
+            <a:pPr marL="0" indent="0">
               <a:buNone/>
             </a:pPr>
             <a:r>
@@ -8123,6 +8184,13 @@
             <a:prstDash val="solid"/>
           </a:ln>
         </p:spPr>
+        <p:txBody>
+          <a:bodyPr/>
+          <a:lstStyle/>
+          <a:p>
+            <a:endParaRPr lang="en-US"/>
+          </a:p>
+        </p:txBody>
       </p:sp>
       <p:sp>
         <p:nvSpPr>
@@ -8145,7 +8213,7 @@
           <a:bodyPr wrap="square" lIns="0" tIns="0" rIns="0" bIns="0" rtlCol="0" anchor="ctr"/>
           <a:lstStyle/>
           <a:p>
-            <a:pPr indent="0" marL="0">
+            <a:pPr marL="0" indent="0">
               <a:buNone/>
             </a:pPr>
             <a:r>
@@ -8184,7 +8252,7 @@
           <a:bodyPr wrap="square" lIns="0" tIns="0" rIns="0" bIns="0" rtlCol="0" anchor="ctr"/>
           <a:lstStyle/>
           <a:p>
-            <a:pPr indent="0" marL="0">
+            <a:pPr marL="0" indent="0">
               <a:buNone/>
             </a:pPr>
             <a:r>
@@ -8223,7 +8291,7 @@
           <a:bodyPr wrap="square" lIns="0" tIns="0" rIns="0" bIns="0" rtlCol="0" anchor="ctr"/>
           <a:lstStyle/>
           <a:p>
-            <a:pPr indent="0" marL="0">
+            <a:pPr marL="0" indent="0">
               <a:buNone/>
             </a:pPr>
             <a:r>
@@ -8257,6 +8325,7 @@
         <a:solidFill>
           <a:srgbClr val="FFFFFF"/>
         </a:solidFill>
+        <a:effectLst/>
       </p:bgPr>
     </p:bg>
     <p:spTree>
@@ -8294,11 +8363,11 @@
           <a:bodyPr wrap="square" lIns="0" tIns="0" rIns="0" bIns="0" rtlCol="0" anchor="ctr"/>
           <a:lstStyle/>
           <a:p>
-            <a:pPr indent="0" marL="0">
-              <a:buNone/>
-            </a:pPr>
-            <a:r>
-              <a:rPr lang="en-US" sz="1200" b="1" spc="200" kern="0" dirty="0">
+            <a:pPr marL="0" indent="0">
+              <a:buNone/>
+            </a:pPr>
+            <a:r>
+              <a:rPr lang="en-US" sz="1200" b="1" kern="0" spc="200" dirty="0">
                 <a:solidFill>
                   <a:srgbClr val="0F766E"/>
                 </a:solidFill>
@@ -8333,7 +8402,7 @@
           <a:bodyPr wrap="square" lIns="0" tIns="0" rIns="0" bIns="0" rtlCol="0" anchor="ctr"/>
           <a:lstStyle/>
           <a:p>
-            <a:pPr indent="0" marL="0">
+            <a:pPr marL="0" indent="0">
               <a:buNone/>
             </a:pPr>
             <a:r>
@@ -8377,13 +8446,20 @@
             <a:prstDash val="solid"/>
           </a:ln>
           <a:effectLst>
-            <a:outerShdw sx="100000" sy="100000" kx="0" ky="0" algn="bl" rotWithShape="0" blurRad="88900" dist="38100" dir="5400000">
+            <a:outerShdw blurRad="88900" dist="38100" dir="5400000" algn="bl" rotWithShape="0">
               <a:srgbClr val="0F172A">
                 <a:alpha val="13000"/>
               </a:srgbClr>
             </a:outerShdw>
           </a:effectLst>
         </p:spPr>
+        <p:txBody>
+          <a:bodyPr/>
+          <a:lstStyle/>
+          <a:p>
+            <a:endParaRPr lang="en-US"/>
+          </a:p>
+        </p:txBody>
       </p:sp>
       <p:sp>
         <p:nvSpPr>
@@ -8409,6 +8485,13 @@
             <a:prstDash val="solid"/>
           </a:ln>
         </p:spPr>
+        <p:txBody>
+          <a:bodyPr/>
+          <a:lstStyle/>
+          <a:p>
+            <a:endParaRPr lang="en-US"/>
+          </a:p>
+        </p:txBody>
       </p:sp>
       <p:sp>
         <p:nvSpPr>
@@ -8431,7 +8514,7 @@
           <a:bodyPr wrap="square" lIns="0" tIns="0" rIns="0" bIns="0" rtlCol="0" anchor="ctr"/>
           <a:lstStyle/>
           <a:p>
-            <a:pPr algn="ctr" indent="0" marL="0">
+            <a:pPr marL="0" indent="0" algn="ctr">
               <a:buNone/>
             </a:pPr>
             <a:r>
@@ -8470,7 +8553,7 @@
           <a:bodyPr wrap="square" lIns="0" tIns="0" rIns="0" bIns="0" rtlCol="0" anchor="ctr"/>
           <a:lstStyle/>
           <a:p>
-            <a:pPr indent="0" marL="0">
+            <a:pPr marL="0" indent="0">
               <a:buNone/>
             </a:pPr>
             <a:r>
@@ -8509,7 +8592,7 @@
           <a:bodyPr wrap="square" lIns="0" tIns="0" rIns="0" bIns="0" rtlCol="0" anchor="ctr"/>
           <a:lstStyle/>
           <a:p>
-            <a:pPr indent="0" marL="0">
+            <a:pPr marL="0" indent="0">
               <a:buNone/>
             </a:pPr>
             <a:r>
@@ -8553,13 +8636,20 @@
             <a:prstDash val="solid"/>
           </a:ln>
           <a:effectLst>
-            <a:outerShdw sx="100000" sy="100000" kx="0" ky="0" algn="bl" rotWithShape="0" blurRad="88900" dist="38100" dir="5400000">
+            <a:outerShdw blurRad="88900" dist="38100" dir="5400000" algn="bl" rotWithShape="0">
               <a:srgbClr val="0F172A">
                 <a:alpha val="13000"/>
               </a:srgbClr>
             </a:outerShdw>
           </a:effectLst>
         </p:spPr>
+        <p:txBody>
+          <a:bodyPr/>
+          <a:lstStyle/>
+          <a:p>
+            <a:endParaRPr lang="en-US"/>
+          </a:p>
+        </p:txBody>
       </p:sp>
       <p:sp>
         <p:nvSpPr>
@@ -8585,6 +8675,13 @@
             <a:prstDash val="solid"/>
           </a:ln>
         </p:spPr>
+        <p:txBody>
+          <a:bodyPr/>
+          <a:lstStyle/>
+          <a:p>
+            <a:endParaRPr lang="en-US"/>
+          </a:p>
+        </p:txBody>
       </p:sp>
       <p:sp>
         <p:nvSpPr>
@@ -8607,7 +8704,7 @@
           <a:bodyPr wrap="square" lIns="0" tIns="0" rIns="0" bIns="0" rtlCol="0" anchor="ctr"/>
           <a:lstStyle/>
           <a:p>
-            <a:pPr algn="ctr" indent="0" marL="0">
+            <a:pPr marL="0" indent="0" algn="ctr">
               <a:buNone/>
             </a:pPr>
             <a:r>
@@ -8646,7 +8743,7 @@
           <a:bodyPr wrap="square" lIns="0" tIns="0" rIns="0" bIns="0" rtlCol="0" anchor="ctr"/>
           <a:lstStyle/>
           <a:p>
-            <a:pPr indent="0" marL="0">
+            <a:pPr marL="0" indent="0">
               <a:buNone/>
             </a:pPr>
             <a:r>
@@ -8685,7 +8782,7 @@
           <a:bodyPr wrap="square" lIns="0" tIns="0" rIns="0" bIns="0" rtlCol="0" anchor="ctr"/>
           <a:lstStyle/>
           <a:p>
-            <a:pPr indent="0" marL="0">
+            <a:pPr marL="0" indent="0">
               <a:buNone/>
             </a:pPr>
             <a:r>
@@ -8729,13 +8826,20 @@
             <a:prstDash val="solid"/>
           </a:ln>
           <a:effectLst>
-            <a:outerShdw sx="100000" sy="100000" kx="0" ky="0" algn="bl" rotWithShape="0" blurRad="88900" dist="38100" dir="5400000">
+            <a:outerShdw blurRad="88900" dist="38100" dir="5400000" algn="bl" rotWithShape="0">
               <a:srgbClr val="0F172A">
                 <a:alpha val="13000"/>
               </a:srgbClr>
             </a:outerShdw>
           </a:effectLst>
         </p:spPr>
+        <p:txBody>
+          <a:bodyPr/>
+          <a:lstStyle/>
+          <a:p>
+            <a:endParaRPr lang="en-US"/>
+          </a:p>
+        </p:txBody>
       </p:sp>
       <p:sp>
         <p:nvSpPr>
@@ -8761,6 +8865,13 @@
             <a:prstDash val="solid"/>
           </a:ln>
         </p:spPr>
+        <p:txBody>
+          <a:bodyPr/>
+          <a:lstStyle/>
+          <a:p>
+            <a:endParaRPr lang="en-US"/>
+          </a:p>
+        </p:txBody>
       </p:sp>
       <p:sp>
         <p:nvSpPr>
@@ -8783,7 +8894,7 @@
           <a:bodyPr wrap="square" lIns="0" tIns="0" rIns="0" bIns="0" rtlCol="0" anchor="ctr"/>
           <a:lstStyle/>
           <a:p>
-            <a:pPr algn="ctr" indent="0" marL="0">
+            <a:pPr marL="0" indent="0" algn="ctr">
               <a:buNone/>
             </a:pPr>
             <a:r>
@@ -8822,7 +8933,7 @@
           <a:bodyPr wrap="square" lIns="0" tIns="0" rIns="0" bIns="0" rtlCol="0" anchor="ctr"/>
           <a:lstStyle/>
           <a:p>
-            <a:pPr indent="0" marL="0">
+            <a:pPr marL="0" indent="0">
               <a:buNone/>
             </a:pPr>
             <a:r>
@@ -8861,7 +8972,7 @@
           <a:bodyPr wrap="square" lIns="0" tIns="0" rIns="0" bIns="0" rtlCol="0" anchor="ctr"/>
           <a:lstStyle/>
           <a:p>
-            <a:pPr indent="0" marL="0">
+            <a:pPr marL="0" indent="0">
               <a:buNone/>
             </a:pPr>
             <a:r>
@@ -8905,13 +9016,20 @@
             <a:prstDash val="solid"/>
           </a:ln>
           <a:effectLst>
-            <a:outerShdw sx="100000" sy="100000" kx="0" ky="0" algn="bl" rotWithShape="0" blurRad="88900" dist="38100" dir="5400000">
+            <a:outerShdw blurRad="88900" dist="38100" dir="5400000" algn="bl" rotWithShape="0">
               <a:srgbClr val="0F172A">
                 <a:alpha val="13000"/>
               </a:srgbClr>
             </a:outerShdw>
           </a:effectLst>
         </p:spPr>
+        <p:txBody>
+          <a:bodyPr/>
+          <a:lstStyle/>
+          <a:p>
+            <a:endParaRPr lang="en-US"/>
+          </a:p>
+        </p:txBody>
       </p:sp>
       <p:sp>
         <p:nvSpPr>
@@ -8937,6 +9055,13 @@
             <a:prstDash val="solid"/>
           </a:ln>
         </p:spPr>
+        <p:txBody>
+          <a:bodyPr/>
+          <a:lstStyle/>
+          <a:p>
+            <a:endParaRPr lang="en-US"/>
+          </a:p>
+        </p:txBody>
       </p:sp>
       <p:sp>
         <p:nvSpPr>
@@ -8959,7 +9084,7 @@
           <a:bodyPr wrap="square" lIns="0" tIns="0" rIns="0" bIns="0" rtlCol="0" anchor="ctr"/>
           <a:lstStyle/>
           <a:p>
-            <a:pPr algn="ctr" indent="0" marL="0">
+            <a:pPr marL="0" indent="0" algn="ctr">
               <a:buNone/>
             </a:pPr>
             <a:r>
@@ -8998,7 +9123,7 @@
           <a:bodyPr wrap="square" lIns="0" tIns="0" rIns="0" bIns="0" rtlCol="0" anchor="ctr"/>
           <a:lstStyle/>
           <a:p>
-            <a:pPr indent="0" marL="0">
+            <a:pPr marL="0" indent="0">
               <a:buNone/>
             </a:pPr>
             <a:r>
@@ -9037,7 +9162,7 @@
           <a:bodyPr wrap="square" lIns="0" tIns="0" rIns="0" bIns="0" rtlCol="0" anchor="ctr"/>
           <a:lstStyle/>
           <a:p>
-            <a:pPr indent="0" marL="0">
+            <a:pPr marL="0" indent="0">
               <a:buNone/>
             </a:pPr>
             <a:r>
@@ -9071,6 +9196,7 @@
         <a:solidFill>
           <a:srgbClr val="FFFFFF"/>
         </a:solidFill>
+        <a:effectLst/>
       </p:bgPr>
     </p:bg>
     <p:spTree>
@@ -9108,11 +9234,11 @@
           <a:bodyPr wrap="square" lIns="0" tIns="0" rIns="0" bIns="0" rtlCol="0" anchor="ctr"/>
           <a:lstStyle/>
           <a:p>
-            <a:pPr indent="0" marL="0">
-              <a:buNone/>
-            </a:pPr>
-            <a:r>
-              <a:rPr lang="en-US" sz="1200" b="1" spc="200" kern="0" dirty="0">
+            <a:pPr marL="0" indent="0">
+              <a:buNone/>
+            </a:pPr>
+            <a:r>
+              <a:rPr lang="en-US" sz="1200" b="1" kern="0" spc="200" dirty="0">
                 <a:solidFill>
                   <a:srgbClr val="0F766E"/>
                 </a:solidFill>
@@ -9147,7 +9273,7 @@
           <a:bodyPr wrap="square" lIns="0" tIns="0" rIns="0" bIns="0" rtlCol="0" anchor="ctr"/>
           <a:lstStyle/>
           <a:p>
-            <a:pPr indent="0" marL="0">
+            <a:pPr marL="0" indent="0">
               <a:buNone/>
             </a:pPr>
             <a:r>
@@ -9191,13 +9317,20 @@
             <a:prstDash val="solid"/>
           </a:ln>
           <a:effectLst>
-            <a:outerShdw sx="100000" sy="100000" kx="0" ky="0" algn="bl" rotWithShape="0" blurRad="88900" dist="38100" dir="5400000">
+            <a:outerShdw blurRad="88900" dist="38100" dir="5400000" algn="bl" rotWithShape="0">
               <a:srgbClr val="0F172A">
                 <a:alpha val="13000"/>
               </a:srgbClr>
             </a:outerShdw>
           </a:effectLst>
         </p:spPr>
+        <p:txBody>
+          <a:bodyPr/>
+          <a:lstStyle/>
+          <a:p>
+            <a:endParaRPr lang="en-US"/>
+          </a:p>
+        </p:txBody>
       </p:sp>
       <p:sp>
         <p:nvSpPr>
@@ -9220,6 +9353,13 @@
           </a:solidFill>
           <a:ln/>
         </p:spPr>
+        <p:txBody>
+          <a:bodyPr/>
+          <a:lstStyle/>
+          <a:p>
+            <a:endParaRPr lang="en-US"/>
+          </a:p>
+        </p:txBody>
       </p:sp>
       <p:sp>
         <p:nvSpPr>
@@ -9242,7 +9382,7 @@
           <a:bodyPr wrap="square" lIns="0" tIns="0" rIns="0" bIns="0" rtlCol="0" anchor="ctr"/>
           <a:lstStyle/>
           <a:p>
-            <a:pPr algn="ctr" indent="0" marL="0">
+            <a:pPr marL="0" indent="0" algn="ctr">
               <a:buNone/>
             </a:pPr>
             <a:r>
@@ -9278,7 +9418,7 @@
           <a:bodyPr wrap="square" lIns="0" tIns="0" rIns="0" bIns="0" rtlCol="0" anchor="ctr"/>
           <a:lstStyle/>
           <a:p>
-            <a:pPr indent="0" marL="0">
+            <a:pPr marL="0" indent="0">
               <a:buNone/>
             </a:pPr>
             <a:r>
@@ -9317,7 +9457,7 @@
           <a:bodyPr wrap="square" lIns="0" tIns="0" rIns="0" bIns="0" rtlCol="0" anchor="ctr"/>
           <a:lstStyle/>
           <a:p>
-            <a:pPr indent="0" marL="0">
+            <a:pPr marL="0" indent="0">
               <a:buNone/>
             </a:pPr>
             <a:r>
@@ -9361,13 +9501,20 @@
             <a:prstDash val="solid"/>
           </a:ln>
           <a:effectLst>
-            <a:outerShdw sx="100000" sy="100000" kx="0" ky="0" algn="bl" rotWithShape="0" blurRad="88900" dist="38100" dir="5400000">
+            <a:outerShdw blurRad="88900" dist="38100" dir="5400000" algn="bl" rotWithShape="0">
               <a:srgbClr val="0F172A">
                 <a:alpha val="13000"/>
               </a:srgbClr>
             </a:outerShdw>
           </a:effectLst>
         </p:spPr>
+        <p:txBody>
+          <a:bodyPr/>
+          <a:lstStyle/>
+          <a:p>
+            <a:endParaRPr lang="en-US"/>
+          </a:p>
+        </p:txBody>
       </p:sp>
       <p:sp>
         <p:nvSpPr>
@@ -9390,6 +9537,13 @@
           </a:solidFill>
           <a:ln/>
         </p:spPr>
+        <p:txBody>
+          <a:bodyPr/>
+          <a:lstStyle/>
+          <a:p>
+            <a:endParaRPr lang="en-US"/>
+          </a:p>
+        </p:txBody>
       </p:sp>
       <p:sp>
         <p:nvSpPr>
@@ -9412,7 +9566,7 @@
           <a:bodyPr wrap="square" lIns="0" tIns="0" rIns="0" bIns="0" rtlCol="0" anchor="ctr"/>
           <a:lstStyle/>
           <a:p>
-            <a:pPr algn="ctr" indent="0" marL="0">
+            <a:pPr marL="0" indent="0" algn="ctr">
               <a:buNone/>
             </a:pPr>
             <a:r>
@@ -9448,7 +9602,7 @@
           <a:bodyPr wrap="square" lIns="0" tIns="0" rIns="0" bIns="0" rtlCol="0" anchor="ctr"/>
           <a:lstStyle/>
           <a:p>
-            <a:pPr indent="0" marL="0">
+            <a:pPr marL="0" indent="0">
               <a:buNone/>
             </a:pPr>
             <a:r>
@@ -9487,7 +9641,7 @@
           <a:bodyPr wrap="square" lIns="0" tIns="0" rIns="0" bIns="0" rtlCol="0" anchor="ctr"/>
           <a:lstStyle/>
           <a:p>
-            <a:pPr indent="0" marL="0">
+            <a:pPr marL="0" indent="0">
               <a:buNone/>
             </a:pPr>
             <a:r>
@@ -9531,13 +9685,20 @@
             <a:prstDash val="solid"/>
           </a:ln>
           <a:effectLst>
-            <a:outerShdw sx="100000" sy="100000" kx="0" ky="0" algn="bl" rotWithShape="0" blurRad="88900" dist="38100" dir="5400000">
+            <a:outerShdw blurRad="88900" dist="38100" dir="5400000" algn="bl" rotWithShape="0">
               <a:srgbClr val="0F172A">
                 <a:alpha val="13000"/>
               </a:srgbClr>
             </a:outerShdw>
           </a:effectLst>
         </p:spPr>
+        <p:txBody>
+          <a:bodyPr/>
+          <a:lstStyle/>
+          <a:p>
+            <a:endParaRPr lang="en-US"/>
+          </a:p>
+        </p:txBody>
       </p:sp>
       <p:sp>
         <p:nvSpPr>
@@ -9560,6 +9721,13 @@
           </a:solidFill>
           <a:ln/>
         </p:spPr>
+        <p:txBody>
+          <a:bodyPr/>
+          <a:lstStyle/>
+          <a:p>
+            <a:endParaRPr lang="en-US"/>
+          </a:p>
+        </p:txBody>
       </p:sp>
       <p:sp>
         <p:nvSpPr>
@@ -9582,7 +9750,7 @@
           <a:bodyPr wrap="square" lIns="0" tIns="0" rIns="0" bIns="0" rtlCol="0" anchor="ctr"/>
           <a:lstStyle/>
           <a:p>
-            <a:pPr algn="ctr" indent="0" marL="0">
+            <a:pPr marL="0" indent="0" algn="ctr">
               <a:buNone/>
             </a:pPr>
             <a:r>
@@ -9618,7 +9786,7 @@
           <a:bodyPr wrap="square" lIns="0" tIns="0" rIns="0" bIns="0" rtlCol="0" anchor="ctr"/>
           <a:lstStyle/>
           <a:p>
-            <a:pPr indent="0" marL="0">
+            <a:pPr marL="0" indent="0">
               <a:buNone/>
             </a:pPr>
             <a:r>
@@ -9657,7 +9825,7 @@
           <a:bodyPr wrap="square" lIns="0" tIns="0" rIns="0" bIns="0" rtlCol="0" anchor="ctr"/>
           <a:lstStyle/>
           <a:p>
-            <a:pPr indent="0" marL="0">
+            <a:pPr marL="0" indent="0">
               <a:buNone/>
             </a:pPr>
             <a:r>
@@ -9691,6 +9859,7 @@
         <a:solidFill>
           <a:srgbClr val="FFFFFF"/>
         </a:solidFill>
+        <a:effectLst/>
       </p:bgPr>
     </p:bg>
     <p:spTree>
@@ -9728,11 +9897,11 @@
           <a:bodyPr wrap="square" lIns="0" tIns="0" rIns="0" bIns="0" rtlCol="0" anchor="ctr"/>
           <a:lstStyle/>
           <a:p>
-            <a:pPr indent="0" marL="0">
-              <a:buNone/>
-            </a:pPr>
-            <a:r>
-              <a:rPr lang="en-US" sz="1200" b="1" spc="200" kern="0" dirty="0">
+            <a:pPr marL="0" indent="0">
+              <a:buNone/>
+            </a:pPr>
+            <a:r>
+              <a:rPr lang="en-US" sz="1200" b="1" kern="0" spc="200" dirty="0">
                 <a:solidFill>
                   <a:srgbClr val="0F766E"/>
                 </a:solidFill>
@@ -9767,7 +9936,7 @@
           <a:bodyPr wrap="square" lIns="0" tIns="0" rIns="0" bIns="0" rtlCol="0" anchor="ctr"/>
           <a:lstStyle/>
           <a:p>
-            <a:pPr indent="0" marL="0">
+            <a:pPr marL="0" indent="0">
               <a:buNone/>
             </a:pPr>
             <a:r>
@@ -9811,13 +9980,20 @@
             <a:prstDash val="solid"/>
           </a:ln>
           <a:effectLst>
-            <a:outerShdw sx="100000" sy="100000" kx="0" ky="0" algn="bl" rotWithShape="0" blurRad="88900" dist="38100" dir="5400000">
+            <a:outerShdw blurRad="88900" dist="38100" dir="5400000" algn="bl" rotWithShape="0">
               <a:srgbClr val="0F172A">
                 <a:alpha val="13000"/>
               </a:srgbClr>
             </a:outerShdw>
           </a:effectLst>
         </p:spPr>
+        <p:txBody>
+          <a:bodyPr/>
+          <a:lstStyle/>
+          <a:p>
+            <a:endParaRPr lang="en-US"/>
+          </a:p>
+        </p:txBody>
       </p:sp>
       <p:sp>
         <p:nvSpPr>
@@ -9840,7 +10016,7 @@
           <a:bodyPr wrap="square" lIns="0" tIns="0" rIns="0" bIns="0" rtlCol="0" anchor="ctr"/>
           <a:lstStyle/>
           <a:p>
-            <a:pPr algn="ctr" indent="0" marL="0">
+            <a:pPr marL="0" indent="0" algn="ctr">
               <a:buNone/>
             </a:pPr>
             <a:r>
@@ -9879,7 +10055,7 @@
           <a:bodyPr wrap="square" lIns="0" tIns="0" rIns="0" bIns="0" rtlCol="0" anchor="ctr"/>
           <a:lstStyle/>
           <a:p>
-            <a:pPr algn="ctr" indent="0" marL="0">
+            <a:pPr marL="0" indent="0" algn="ctr">
               <a:buNone/>
             </a:pPr>
             <a:r>
@@ -9896,7 +10072,7 @@
             <a:endParaRPr lang="en-US" sz="1000" dirty="0"/>
           </a:p>
           <a:p>
-            <a:pPr algn="ctr" indent="0" marL="0">
+            <a:pPr marL="0" indent="0" algn="ctr">
               <a:buNone/>
             </a:pPr>
             <a:r>
@@ -9935,7 +10111,7 @@
           <a:bodyPr wrap="square" lIns="0" tIns="0" rIns="0" bIns="0" rtlCol="0" anchor="ctr"/>
           <a:lstStyle/>
           <a:p>
-            <a:pPr algn="ctr" indent="0" marL="0">
+            <a:pPr marL="0" indent="0" algn="ctr">
               <a:buNone/>
             </a:pPr>
             <a:r>
@@ -9976,13 +10152,20 @@
             <a:prstDash val="solid"/>
           </a:ln>
           <a:effectLst>
-            <a:outerShdw sx="100000" sy="100000" kx="0" ky="0" algn="bl" rotWithShape="0" blurRad="88900" dist="38100" dir="5400000">
+            <a:outerShdw blurRad="88900" dist="38100" dir="5400000" algn="bl" rotWithShape="0">
               <a:srgbClr val="0F172A">
                 <a:alpha val="13000"/>
               </a:srgbClr>
             </a:outerShdw>
           </a:effectLst>
         </p:spPr>
+        <p:txBody>
+          <a:bodyPr/>
+          <a:lstStyle/>
+          <a:p>
+            <a:endParaRPr lang="en-US"/>
+          </a:p>
+        </p:txBody>
       </p:sp>
       <p:sp>
         <p:nvSpPr>
@@ -10005,7 +10188,7 @@
           <a:bodyPr wrap="square" lIns="0" tIns="0" rIns="0" bIns="0" rtlCol="0" anchor="ctr"/>
           <a:lstStyle/>
           <a:p>
-            <a:pPr algn="ctr" indent="0" marL="0">
+            <a:pPr marL="0" indent="0" algn="ctr">
               <a:buNone/>
             </a:pPr>
             <a:r>
@@ -10044,7 +10227,7 @@
           <a:bodyPr wrap="square" lIns="0" tIns="0" rIns="0" bIns="0" rtlCol="0" anchor="ctr"/>
           <a:lstStyle/>
           <a:p>
-            <a:pPr algn="ctr" indent="0" marL="0">
+            <a:pPr marL="0" indent="0" algn="ctr">
               <a:buNone/>
             </a:pPr>
             <a:r>
@@ -10061,7 +10244,7 @@
             <a:endParaRPr lang="en-US" sz="1000" dirty="0"/>
           </a:p>
           <a:p>
-            <a:pPr algn="ctr" indent="0" marL="0">
+            <a:pPr marL="0" indent="0" algn="ctr">
               <a:buNone/>
             </a:pPr>
             <a:r>
@@ -10100,7 +10283,7 @@
           <a:bodyPr wrap="square" lIns="0" tIns="0" rIns="0" bIns="0" rtlCol="0" anchor="ctr"/>
           <a:lstStyle/>
           <a:p>
-            <a:pPr algn="ctr" indent="0" marL="0">
+            <a:pPr marL="0" indent="0" algn="ctr">
               <a:buNone/>
             </a:pPr>
             <a:r>
@@ -10141,13 +10324,20 @@
             <a:prstDash val="solid"/>
           </a:ln>
           <a:effectLst>
-            <a:outerShdw sx="100000" sy="100000" kx="0" ky="0" algn="bl" rotWithShape="0" blurRad="88900" dist="38100" dir="5400000">
+            <a:outerShdw blurRad="88900" dist="38100" dir="5400000" algn="bl" rotWithShape="0">
               <a:srgbClr val="0F172A">
                 <a:alpha val="13000"/>
               </a:srgbClr>
             </a:outerShdw>
           </a:effectLst>
         </p:spPr>
+        <p:txBody>
+          <a:bodyPr/>
+          <a:lstStyle/>
+          <a:p>
+            <a:endParaRPr lang="en-US"/>
+          </a:p>
+        </p:txBody>
       </p:sp>
       <p:sp>
         <p:nvSpPr>
@@ -10170,7 +10360,7 @@
           <a:bodyPr wrap="square" lIns="0" tIns="0" rIns="0" bIns="0" rtlCol="0" anchor="ctr"/>
           <a:lstStyle/>
           <a:p>
-            <a:pPr algn="ctr" indent="0" marL="0">
+            <a:pPr marL="0" indent="0" algn="ctr">
               <a:buNone/>
             </a:pPr>
             <a:r>
@@ -10209,7 +10399,7 @@
           <a:bodyPr wrap="square" lIns="0" tIns="0" rIns="0" bIns="0" rtlCol="0" anchor="ctr"/>
           <a:lstStyle/>
           <a:p>
-            <a:pPr algn="ctr" indent="0" marL="0">
+            <a:pPr marL="0" indent="0" algn="ctr">
               <a:buNone/>
             </a:pPr>
             <a:r>
@@ -10226,7 +10416,7 @@
             <a:endParaRPr lang="en-US" sz="1000" dirty="0"/>
           </a:p>
           <a:p>
-            <a:pPr algn="ctr" indent="0" marL="0">
+            <a:pPr marL="0" indent="0" algn="ctr">
               <a:buNone/>
             </a:pPr>
             <a:r>
@@ -10265,7 +10455,7 @@
           <a:bodyPr wrap="square" lIns="0" tIns="0" rIns="0" bIns="0" rtlCol="0" anchor="ctr"/>
           <a:lstStyle/>
           <a:p>
-            <a:pPr algn="ctr" indent="0" marL="0">
+            <a:pPr marL="0" indent="0" algn="ctr">
               <a:buNone/>
             </a:pPr>
             <a:r>
@@ -10306,13 +10496,20 @@
             <a:prstDash val="solid"/>
           </a:ln>
           <a:effectLst>
-            <a:outerShdw sx="100000" sy="100000" kx="0" ky="0" algn="bl" rotWithShape="0" blurRad="88900" dist="38100" dir="5400000">
+            <a:outerShdw blurRad="88900" dist="38100" dir="5400000" algn="bl" rotWithShape="0">
               <a:srgbClr val="0F172A">
                 <a:alpha val="13000"/>
               </a:srgbClr>
             </a:outerShdw>
           </a:effectLst>
         </p:spPr>
+        <p:txBody>
+          <a:bodyPr/>
+          <a:lstStyle/>
+          <a:p>
+            <a:endParaRPr lang="en-US"/>
+          </a:p>
+        </p:txBody>
       </p:sp>
       <p:sp>
         <p:nvSpPr>
@@ -10335,7 +10532,7 @@
           <a:bodyPr wrap="square" lIns="0" tIns="0" rIns="0" bIns="0" rtlCol="0" anchor="ctr"/>
           <a:lstStyle/>
           <a:p>
-            <a:pPr algn="ctr" indent="0" marL="0">
+            <a:pPr marL="0" indent="0" algn="ctr">
               <a:buNone/>
             </a:pPr>
             <a:r>
@@ -10374,7 +10571,7 @@
           <a:bodyPr wrap="square" lIns="0" tIns="0" rIns="0" bIns="0" rtlCol="0" anchor="ctr"/>
           <a:lstStyle/>
           <a:p>
-            <a:pPr algn="ctr" indent="0" marL="0">
+            <a:pPr marL="0" indent="0" algn="ctr">
               <a:buNone/>
             </a:pPr>
             <a:r>
@@ -10391,7 +10588,7 @@
             <a:endParaRPr lang="en-US" sz="1000" dirty="0"/>
           </a:p>
           <a:p>
-            <a:pPr algn="ctr" indent="0" marL="0">
+            <a:pPr marL="0" indent="0" algn="ctr">
               <a:buNone/>
             </a:pPr>
             <a:r>
@@ -10430,7 +10627,7 @@
           <a:bodyPr wrap="square" lIns="0" tIns="0" rIns="0" bIns="0" rtlCol="0" anchor="ctr"/>
           <a:lstStyle/>
           <a:p>
-            <a:pPr algn="ctr" indent="0" marL="0">
+            <a:pPr marL="0" indent="0" algn="ctr">
               <a:buNone/>
             </a:pPr>
             <a:r>
@@ -10471,13 +10668,20 @@
             <a:prstDash val="solid"/>
           </a:ln>
           <a:effectLst>
-            <a:outerShdw sx="100000" sy="100000" kx="0" ky="0" algn="bl" rotWithShape="0" blurRad="88900" dist="38100" dir="5400000">
+            <a:outerShdw blurRad="88900" dist="38100" dir="5400000" algn="bl" rotWithShape="0">
               <a:srgbClr val="0F172A">
                 <a:alpha val="13000"/>
               </a:srgbClr>
             </a:outerShdw>
           </a:effectLst>
         </p:spPr>
+        <p:txBody>
+          <a:bodyPr/>
+          <a:lstStyle/>
+          <a:p>
+            <a:endParaRPr lang="en-US"/>
+          </a:p>
+        </p:txBody>
       </p:sp>
       <p:sp>
         <p:nvSpPr>
@@ -10500,7 +10704,7 @@
           <a:bodyPr wrap="square" lIns="0" tIns="0" rIns="0" bIns="0" rtlCol="0" anchor="ctr"/>
           <a:lstStyle/>
           <a:p>
-            <a:pPr algn="ctr" indent="0" marL="0">
+            <a:pPr marL="0" indent="0" algn="ctr">
               <a:buNone/>
             </a:pPr>
             <a:r>
@@ -10539,7 +10743,7 @@
           <a:bodyPr wrap="square" lIns="0" tIns="0" rIns="0" bIns="0" rtlCol="0" anchor="ctr"/>
           <a:lstStyle/>
           <a:p>
-            <a:pPr algn="ctr" indent="0" marL="0">
+            <a:pPr marL="0" indent="0" algn="ctr">
               <a:buNone/>
             </a:pPr>
             <a:r>
@@ -10556,7 +10760,7 @@
             <a:endParaRPr lang="en-US" sz="1000" dirty="0"/>
           </a:p>
           <a:p>
-            <a:pPr algn="ctr" indent="0" marL="0">
+            <a:pPr marL="0" indent="0" algn="ctr">
               <a:buNone/>
             </a:pPr>
             <a:r>
@@ -10600,6 +10804,13 @@
             <a:prstDash val="solid"/>
           </a:ln>
         </p:spPr>
+        <p:txBody>
+          <a:bodyPr/>
+          <a:lstStyle/>
+          <a:p>
+            <a:endParaRPr lang="en-US"/>
+          </a:p>
+        </p:txBody>
       </p:sp>
       <p:sp>
         <p:nvSpPr>
@@ -10622,7 +10833,7 @@
           <a:bodyPr wrap="square" lIns="0" tIns="0" rIns="0" bIns="0" rtlCol="0" anchor="ctr"/>
           <a:lstStyle/>
           <a:p>
-            <a:pPr indent="0" marL="0">
+            <a:pPr marL="0" indent="0">
               <a:buNone/>
             </a:pPr>
             <a:r>
@@ -10636,9 +10847,6 @@
               </a:rPr>
               <a:t>Speed layer   </a:t>
             </a:r>
-            <a:pPr indent="0" marL="0">
-              <a:buNone/>
-            </a:pPr>
             <a:r>
               <a:rPr lang="en-US" sz="1250" dirty="0">
                 <a:solidFill>
@@ -10670,6 +10878,7 @@
         <a:solidFill>
           <a:srgbClr val="FFFFFF"/>
         </a:solidFill>
+        <a:effectLst/>
       </p:bgPr>
     </p:bg>
     <p:spTree>
@@ -10707,11 +10916,11 @@
           <a:bodyPr wrap="square" lIns="0" tIns="0" rIns="0" bIns="0" rtlCol="0" anchor="ctr"/>
           <a:lstStyle/>
           <a:p>
-            <a:pPr indent="0" marL="0">
-              <a:buNone/>
-            </a:pPr>
-            <a:r>
-              <a:rPr lang="en-US" sz="1200" b="1" spc="200" kern="0" dirty="0">
+            <a:pPr marL="0" indent="0">
+              <a:buNone/>
+            </a:pPr>
+            <a:r>
+              <a:rPr lang="en-US" sz="1200" b="1" kern="0" spc="200" dirty="0">
                 <a:solidFill>
                   <a:srgbClr val="0F766E"/>
                 </a:solidFill>
@@ -10746,7 +10955,7 @@
           <a:bodyPr wrap="square" lIns="0" tIns="0" rIns="0" bIns="0" rtlCol="0" anchor="ctr"/>
           <a:lstStyle/>
           <a:p>
-            <a:pPr indent="0" marL="0">
+            <a:pPr marL="0" indent="0">
               <a:buNone/>
             </a:pPr>
             <a:r>
@@ -10780,16 +10989,34 @@
         </p:nvGraphicFramePr>
         <p:xfrm>
           <a:off x="502920" y="1600200"/>
-          <a:ext cx="8138160" cy="914400"/>
+          <a:ext cx="8138160" cy="2414016"/>
         </p:xfrm>
         <a:graphic>
           <a:graphicData uri="http://schemas.openxmlformats.org/drawingml/2006/table">
             <a:tbl>
               <a:tblPr/>
               <a:tblGrid>
-                <a:gridCol w="1920240"/>
-                <a:gridCol w="3108960"/>
-                <a:gridCol w="3108960"/>
+                <a:gridCol w="1920240">
+                  <a:extLst>
+                    <a:ext uri="{9D8B030D-6E8A-4147-A177-3AD203B41FA5}">
+                      <a16:colId xmlns:a16="http://schemas.microsoft.com/office/drawing/2014/main" val="20000"/>
+                    </a:ext>
+                  </a:extLst>
+                </a:gridCol>
+                <a:gridCol w="3108960">
+                  <a:extLst>
+                    <a:ext uri="{9D8B030D-6E8A-4147-A177-3AD203B41FA5}">
+                      <a16:colId xmlns:a16="http://schemas.microsoft.com/office/drawing/2014/main" val="20001"/>
+                    </a:ext>
+                  </a:extLst>
+                </a:gridCol>
+                <a:gridCol w="3108960">
+                  <a:extLst>
+                    <a:ext uri="{9D8B030D-6E8A-4147-A177-3AD203B41FA5}">
+                      <a16:colId xmlns:a16="http://schemas.microsoft.com/office/drawing/2014/main" val="20002"/>
+                    </a:ext>
+                  </a:extLst>
+                </a:gridCol>
               </a:tblGrid>
               <a:tr h="402336">
                 <a:tc>
@@ -10797,7 +11024,7 @@
                     <a:bodyPr/>
                     <a:lstStyle/>
                     <a:p>
-                      <a:pPr algn="l" indent="0" marL="0">
+                      <a:pPr marL="0" indent="0" algn="l">
                         <a:buNone/>
                       </a:pPr>
                       <a:r>
@@ -10818,7 +11045,7 @@
                       </a:endParaRPr>
                     </a:p>
                   </a:txBody>
-                  <a:tcPr marL="91440" marR="91440" marT="45720" marB="45720" anchor="ctr">
+                  <a:tcPr anchor="ctr">
                     <a:lnL w="12700" cap="flat" cmpd="sng" algn="ctr">
                       <a:solidFill>
                         <a:srgbClr val="E2E8F0"/>
@@ -10865,7 +11092,7 @@
                     <a:bodyPr/>
                     <a:lstStyle/>
                     <a:p>
-                      <a:pPr algn="l" indent="0" marL="0">
+                      <a:pPr marL="0" indent="0" algn="l">
                         <a:buNone/>
                       </a:pPr>
                       <a:r>
@@ -10886,7 +11113,7 @@
                       </a:endParaRPr>
                     </a:p>
                   </a:txBody>
-                  <a:tcPr marL="91440" marR="91440" marT="45720" marB="45720" anchor="ctr">
+                  <a:tcPr anchor="ctr">
                     <a:lnL w="12700" cap="flat" cmpd="sng" algn="ctr">
                       <a:solidFill>
                         <a:srgbClr val="E2E8F0"/>
@@ -10933,7 +11160,7 @@
                     <a:bodyPr/>
                     <a:lstStyle/>
                     <a:p>
-                      <a:pPr algn="l" indent="0" marL="0">
+                      <a:pPr marL="0" indent="0" algn="l">
                         <a:buNone/>
                       </a:pPr>
                       <a:r>
@@ -10954,7 +11181,7 @@
                       </a:endParaRPr>
                     </a:p>
                   </a:txBody>
-                  <a:tcPr marL="91440" marR="91440" marT="45720" marB="45720" anchor="ctr">
+                  <a:tcPr anchor="ctr">
                     <a:lnL w="12700" cap="flat" cmpd="sng" algn="ctr">
                       <a:solidFill>
                         <a:srgbClr val="E2E8F0"/>
@@ -10996,6 +11223,11 @@
                     </a:solidFill>
                   </a:tcPr>
                 </a:tc>
+                <a:extLst>
+                  <a:ext uri="{0D108BD9-81ED-4DB2-BD59-A6C34878D82A}">
+                    <a16:rowId xmlns:a16="http://schemas.microsoft.com/office/drawing/2014/main" val="10000"/>
+                  </a:ext>
+                </a:extLst>
               </a:tr>
               <a:tr h="402336">
                 <a:tc>
@@ -11003,7 +11235,7 @@
                     <a:bodyPr/>
                     <a:lstStyle/>
                     <a:p>
-                      <a:pPr indent="0" marL="0">
+                      <a:pPr marL="0" indent="0">
                         <a:buNone/>
                       </a:pPr>
                       <a:r>
@@ -11024,7 +11256,7 @@
                       </a:endParaRPr>
                     </a:p>
                   </a:txBody>
-                  <a:tcPr marL="91440" marR="91440" marT="45720" marB="45720" anchor="ctr">
+                  <a:tcPr anchor="ctr">
                     <a:lnL w="12700" cap="flat" cmpd="sng" algn="ctr">
                       <a:solidFill>
                         <a:srgbClr val="E2E8F0"/>
@@ -11071,7 +11303,7 @@
                     <a:bodyPr/>
                     <a:lstStyle/>
                     <a:p>
-                      <a:pPr indent="0" marL="0">
+                      <a:pPr marL="0" indent="0">
                         <a:buNone/>
                       </a:pPr>
                       <a:r>
@@ -11092,7 +11324,7 @@
                       </a:endParaRPr>
                     </a:p>
                   </a:txBody>
-                  <a:tcPr marL="91440" marR="91440" marT="45720" marB="45720" anchor="ctr">
+                  <a:tcPr anchor="ctr">
                     <a:lnL w="12700" cap="flat" cmpd="sng" algn="ctr">
                       <a:solidFill>
                         <a:srgbClr val="E2E8F0"/>
@@ -11139,7 +11371,7 @@
                     <a:bodyPr/>
                     <a:lstStyle/>
                     <a:p>
-                      <a:pPr indent="0" marL="0">
+                      <a:pPr marL="0" indent="0">
                         <a:buNone/>
                       </a:pPr>
                       <a:r>
@@ -11160,7 +11392,7 @@
                       </a:endParaRPr>
                     </a:p>
                   </a:txBody>
-                  <a:tcPr marL="91440" marR="91440" marT="45720" marB="45720" anchor="ctr">
+                  <a:tcPr anchor="ctr">
                     <a:lnL w="12700" cap="flat" cmpd="sng" algn="ctr">
                       <a:solidFill>
                         <a:srgbClr val="E2E8F0"/>
@@ -11202,6 +11434,11 @@
                     </a:solidFill>
                   </a:tcPr>
                 </a:tc>
+                <a:extLst>
+                  <a:ext uri="{0D108BD9-81ED-4DB2-BD59-A6C34878D82A}">
+                    <a16:rowId xmlns:a16="http://schemas.microsoft.com/office/drawing/2014/main" val="10001"/>
+                  </a:ext>
+                </a:extLst>
               </a:tr>
               <a:tr h="402336">
                 <a:tc>
@@ -11209,7 +11446,7 @@
                     <a:bodyPr/>
                     <a:lstStyle/>
                     <a:p>
-                      <a:pPr indent="0" marL="0">
+                      <a:pPr marL="0" indent="0">
                         <a:buNone/>
                       </a:pPr>
                       <a:r>
@@ -11230,7 +11467,7 @@
                       </a:endParaRPr>
                     </a:p>
                   </a:txBody>
-                  <a:tcPr marL="91440" marR="91440" marT="45720" marB="45720" anchor="ctr">
+                  <a:tcPr anchor="ctr">
                     <a:lnL w="12700" cap="flat" cmpd="sng" algn="ctr">
                       <a:solidFill>
                         <a:srgbClr val="E2E8F0"/>
@@ -11277,7 +11514,7 @@
                     <a:bodyPr/>
                     <a:lstStyle/>
                     <a:p>
-                      <a:pPr indent="0" marL="0">
+                      <a:pPr marL="0" indent="0">
                         <a:buNone/>
                       </a:pPr>
                       <a:r>
@@ -11298,7 +11535,7 @@
                       </a:endParaRPr>
                     </a:p>
                   </a:txBody>
-                  <a:tcPr marL="91440" marR="91440" marT="45720" marB="45720" anchor="ctr">
+                  <a:tcPr anchor="ctr">
                     <a:lnL w="12700" cap="flat" cmpd="sng" algn="ctr">
                       <a:solidFill>
                         <a:srgbClr val="E2E8F0"/>
@@ -11345,7 +11582,7 @@
                     <a:bodyPr/>
                     <a:lstStyle/>
                     <a:p>
-                      <a:pPr indent="0" marL="0">
+                      <a:pPr marL="0" indent="0">
                         <a:buNone/>
                       </a:pPr>
                       <a:r>
@@ -11366,7 +11603,7 @@
                       </a:endParaRPr>
                     </a:p>
                   </a:txBody>
-                  <a:tcPr marL="91440" marR="91440" marT="45720" marB="45720" anchor="ctr">
+                  <a:tcPr anchor="ctr">
                     <a:lnL w="12700" cap="flat" cmpd="sng" algn="ctr">
                       <a:solidFill>
                         <a:srgbClr val="E2E8F0"/>
@@ -11408,6 +11645,11 @@
                     </a:solidFill>
                   </a:tcPr>
                 </a:tc>
+                <a:extLst>
+                  <a:ext uri="{0D108BD9-81ED-4DB2-BD59-A6C34878D82A}">
+                    <a16:rowId xmlns:a16="http://schemas.microsoft.com/office/drawing/2014/main" val="10002"/>
+                  </a:ext>
+                </a:extLst>
               </a:tr>
               <a:tr h="402336">
                 <a:tc>
@@ -11415,7 +11657,7 @@
                     <a:bodyPr/>
                     <a:lstStyle/>
                     <a:p>
-                      <a:pPr indent="0" marL="0">
+                      <a:pPr marL="0" indent="0">
                         <a:buNone/>
                       </a:pPr>
                       <a:r>
@@ -11436,7 +11678,7 @@
                       </a:endParaRPr>
                     </a:p>
                   </a:txBody>
-                  <a:tcPr marL="91440" marR="91440" marT="45720" marB="45720" anchor="ctr">
+                  <a:tcPr anchor="ctr">
                     <a:lnL w="12700" cap="flat" cmpd="sng" algn="ctr">
                       <a:solidFill>
                         <a:srgbClr val="E2E8F0"/>
@@ -11483,7 +11725,7 @@
                     <a:bodyPr/>
                     <a:lstStyle/>
                     <a:p>
-                      <a:pPr indent="0" marL="0">
+                      <a:pPr marL="0" indent="0">
                         <a:buNone/>
                       </a:pPr>
                       <a:r>
@@ -11504,7 +11746,7 @@
                       </a:endParaRPr>
                     </a:p>
                   </a:txBody>
-                  <a:tcPr marL="91440" marR="91440" marT="45720" marB="45720" anchor="ctr">
+                  <a:tcPr anchor="ctr">
                     <a:lnL w="12700" cap="flat" cmpd="sng" algn="ctr">
                       <a:solidFill>
                         <a:srgbClr val="E2E8F0"/>
@@ -11551,7 +11793,7 @@
                     <a:bodyPr/>
                     <a:lstStyle/>
                     <a:p>
-                      <a:pPr indent="0" marL="0">
+                      <a:pPr marL="0" indent="0">
                         <a:buNone/>
                       </a:pPr>
                       <a:r>
@@ -11572,7 +11814,7 @@
                       </a:endParaRPr>
                     </a:p>
                   </a:txBody>
-                  <a:tcPr marL="91440" marR="91440" marT="45720" marB="45720" anchor="ctr">
+                  <a:tcPr anchor="ctr">
                     <a:lnL w="12700" cap="flat" cmpd="sng" algn="ctr">
                       <a:solidFill>
                         <a:srgbClr val="E2E8F0"/>
@@ -11614,6 +11856,11 @@
                     </a:solidFill>
                   </a:tcPr>
                 </a:tc>
+                <a:extLst>
+                  <a:ext uri="{0D108BD9-81ED-4DB2-BD59-A6C34878D82A}">
+                    <a16:rowId xmlns:a16="http://schemas.microsoft.com/office/drawing/2014/main" val="10003"/>
+                  </a:ext>
+                </a:extLst>
               </a:tr>
               <a:tr h="402336">
                 <a:tc>
@@ -11621,7 +11868,7 @@
                     <a:bodyPr/>
                     <a:lstStyle/>
                     <a:p>
-                      <a:pPr indent="0" marL="0">
+                      <a:pPr marL="0" indent="0">
                         <a:buNone/>
                       </a:pPr>
                       <a:r>
@@ -11642,7 +11889,7 @@
                       </a:endParaRPr>
                     </a:p>
                   </a:txBody>
-                  <a:tcPr marL="91440" marR="91440" marT="45720" marB="45720" anchor="ctr">
+                  <a:tcPr anchor="ctr">
                     <a:lnL w="12700" cap="flat" cmpd="sng" algn="ctr">
                       <a:solidFill>
                         <a:srgbClr val="E2E8F0"/>
@@ -11689,7 +11936,7 @@
                     <a:bodyPr/>
                     <a:lstStyle/>
                     <a:p>
-                      <a:pPr indent="0" marL="0">
+                      <a:pPr marL="0" indent="0">
                         <a:buNone/>
                       </a:pPr>
                       <a:r>
@@ -11710,7 +11957,7 @@
                       </a:endParaRPr>
                     </a:p>
                   </a:txBody>
-                  <a:tcPr marL="91440" marR="91440" marT="45720" marB="45720" anchor="ctr">
+                  <a:tcPr anchor="ctr">
                     <a:lnL w="12700" cap="flat" cmpd="sng" algn="ctr">
                       <a:solidFill>
                         <a:srgbClr val="E2E8F0"/>
@@ -11757,7 +12004,7 @@
                     <a:bodyPr/>
                     <a:lstStyle/>
                     <a:p>
-                      <a:pPr indent="0" marL="0">
+                      <a:pPr marL="0" indent="0">
                         <a:buNone/>
                       </a:pPr>
                       <a:r>
@@ -11778,7 +12025,7 @@
                       </a:endParaRPr>
                     </a:p>
                   </a:txBody>
-                  <a:tcPr marL="91440" marR="91440" marT="45720" marB="45720" anchor="ctr">
+                  <a:tcPr anchor="ctr">
                     <a:lnL w="12700" cap="flat" cmpd="sng" algn="ctr">
                       <a:solidFill>
                         <a:srgbClr val="E2E8F0"/>
@@ -11820,6 +12067,11 @@
                     </a:solidFill>
                   </a:tcPr>
                 </a:tc>
+                <a:extLst>
+                  <a:ext uri="{0D108BD9-81ED-4DB2-BD59-A6C34878D82A}">
+                    <a16:rowId xmlns:a16="http://schemas.microsoft.com/office/drawing/2014/main" val="10004"/>
+                  </a:ext>
+                </a:extLst>
               </a:tr>
               <a:tr h="402336">
                 <a:tc>
@@ -11827,7 +12079,7 @@
                     <a:bodyPr/>
                     <a:lstStyle/>
                     <a:p>
-                      <a:pPr indent="0" marL="0">
+                      <a:pPr marL="0" indent="0">
                         <a:buNone/>
                       </a:pPr>
                       <a:r>
@@ -11848,7 +12100,7 @@
                       </a:endParaRPr>
                     </a:p>
                   </a:txBody>
-                  <a:tcPr marL="91440" marR="91440" marT="45720" marB="45720" anchor="ctr">
+                  <a:tcPr anchor="ctr">
                     <a:lnL w="12700" cap="flat" cmpd="sng" algn="ctr">
                       <a:solidFill>
                         <a:srgbClr val="E2E8F0"/>
@@ -11895,7 +12147,7 @@
                     <a:bodyPr/>
                     <a:lstStyle/>
                     <a:p>
-                      <a:pPr indent="0" marL="0">
+                      <a:pPr marL="0" indent="0">
                         <a:buNone/>
                       </a:pPr>
                       <a:r>
@@ -11916,7 +12168,7 @@
                       </a:endParaRPr>
                     </a:p>
                   </a:txBody>
-                  <a:tcPr marL="91440" marR="91440" marT="45720" marB="45720" anchor="ctr">
+                  <a:tcPr anchor="ctr">
                     <a:lnL w="12700" cap="flat" cmpd="sng" algn="ctr">
                       <a:solidFill>
                         <a:srgbClr val="E2E8F0"/>
@@ -11963,7 +12215,7 @@
                     <a:bodyPr/>
                     <a:lstStyle/>
                     <a:p>
-                      <a:pPr indent="0" marL="0">
+                      <a:pPr marL="0" indent="0">
                         <a:buNone/>
                       </a:pPr>
                       <a:r>
@@ -11984,7 +12236,7 @@
                       </a:endParaRPr>
                     </a:p>
                   </a:txBody>
-                  <a:tcPr marL="91440" marR="91440" marT="45720" marB="45720" anchor="ctr">
+                  <a:tcPr anchor="ctr">
                     <a:lnL w="12700" cap="flat" cmpd="sng" algn="ctr">
                       <a:solidFill>
                         <a:srgbClr val="E2E8F0"/>
@@ -12026,6 +12278,11 @@
                     </a:solidFill>
                   </a:tcPr>
                 </a:tc>
+                <a:extLst>
+                  <a:ext uri="{0D108BD9-81ED-4DB2-BD59-A6C34878D82A}">
+                    <a16:rowId xmlns:a16="http://schemas.microsoft.com/office/drawing/2014/main" val="10005"/>
+                  </a:ext>
+                </a:extLst>
               </a:tr>
             </a:tbl>
           </a:graphicData>
@@ -12052,7 +12309,7 @@
           <a:bodyPr wrap="square" lIns="0" tIns="0" rIns="0" bIns="0" rtlCol="0" anchor="ctr"/>
           <a:lstStyle/>
           <a:p>
-            <a:pPr indent="0" marL="0">
+            <a:pPr marL="0" indent="0">
               <a:buNone/>
             </a:pPr>
             <a:r>
@@ -12086,6 +12343,7 @@
         <a:solidFill>
           <a:srgbClr val="FFFFFF"/>
         </a:solidFill>
+        <a:effectLst/>
       </p:bgPr>
     </p:bg>
     <p:spTree>
@@ -12123,11 +12381,11 @@
           <a:bodyPr wrap="square" lIns="0" tIns="0" rIns="0" bIns="0" rtlCol="0" anchor="ctr"/>
           <a:lstStyle/>
           <a:p>
-            <a:pPr indent="0" marL="0">
-              <a:buNone/>
-            </a:pPr>
-            <a:r>
-              <a:rPr lang="en-US" sz="1200" b="1" spc="200" kern="0" dirty="0">
+            <a:pPr marL="0" indent="0">
+              <a:buNone/>
+            </a:pPr>
+            <a:r>
+              <a:rPr lang="en-US" sz="1200" b="1" kern="0" spc="200" dirty="0">
                 <a:solidFill>
                   <a:srgbClr val="0F766E"/>
                 </a:solidFill>
@@ -12162,7 +12420,7 @@
           <a:bodyPr wrap="square" lIns="0" tIns="0" rIns="0" bIns="0" rtlCol="0" anchor="ctr"/>
           <a:lstStyle/>
           <a:p>
-            <a:pPr indent="0" marL="0">
+            <a:pPr marL="0" indent="0">
               <a:buNone/>
             </a:pPr>
             <a:r>
@@ -12206,13 +12464,20 @@
             <a:prstDash val="solid"/>
           </a:ln>
           <a:effectLst>
-            <a:outerShdw sx="100000" sy="100000" kx="0" ky="0" algn="bl" rotWithShape="0" blurRad="88900" dist="38100" dir="5400000">
+            <a:outerShdw blurRad="88900" dist="38100" dir="5400000" algn="bl" rotWithShape="0">
               <a:srgbClr val="0F172A">
                 <a:alpha val="13000"/>
               </a:srgbClr>
             </a:outerShdw>
           </a:effectLst>
         </p:spPr>
+        <p:txBody>
+          <a:bodyPr/>
+          <a:lstStyle/>
+          <a:p>
+            <a:endParaRPr lang="en-US"/>
+          </a:p>
+        </p:txBody>
       </p:sp>
       <p:sp>
         <p:nvSpPr>
@@ -12238,6 +12503,13 @@
             <a:prstDash val="solid"/>
           </a:ln>
         </p:spPr>
+        <p:txBody>
+          <a:bodyPr/>
+          <a:lstStyle/>
+          <a:p>
+            <a:endParaRPr lang="en-US"/>
+          </a:p>
+        </p:txBody>
       </p:sp>
       <p:sp>
         <p:nvSpPr>
@@ -12260,7 +12532,7 @@
           <a:bodyPr wrap="square" lIns="0" tIns="0" rIns="0" bIns="0" rtlCol="0" anchor="ctr"/>
           <a:lstStyle/>
           <a:p>
-            <a:pPr algn="ctr" indent="0" marL="0">
+            <a:pPr marL="0" indent="0" algn="ctr">
               <a:buNone/>
             </a:pPr>
             <a:r>
@@ -12299,7 +12571,7 @@
           <a:bodyPr wrap="square" lIns="0" tIns="0" rIns="0" bIns="0" rtlCol="0" anchor="ctr"/>
           <a:lstStyle/>
           <a:p>
-            <a:pPr indent="0" marL="0">
+            <a:pPr marL="0" indent="0">
               <a:buNone/>
             </a:pPr>
             <a:r>
@@ -12338,7 +12610,7 @@
           <a:bodyPr wrap="square" lIns="0" tIns="0" rIns="0" bIns="0" rtlCol="0" anchor="ctr"/>
           <a:lstStyle/>
           <a:p>
-            <a:pPr indent="0" marL="0">
+            <a:pPr marL="0" indent="0">
               <a:buNone/>
             </a:pPr>
             <a:r>
@@ -12382,13 +12654,20 @@
             <a:prstDash val="solid"/>
           </a:ln>
           <a:effectLst>
-            <a:outerShdw sx="100000" sy="100000" kx="0" ky="0" algn="bl" rotWithShape="0" blurRad="88900" dist="38100" dir="5400000">
+            <a:outerShdw blurRad="88900" dist="38100" dir="5400000" algn="bl" rotWithShape="0">
               <a:srgbClr val="0F172A">
                 <a:alpha val="13000"/>
               </a:srgbClr>
             </a:outerShdw>
           </a:effectLst>
         </p:spPr>
+        <p:txBody>
+          <a:bodyPr/>
+          <a:lstStyle/>
+          <a:p>
+            <a:endParaRPr lang="en-US"/>
+          </a:p>
+        </p:txBody>
       </p:sp>
       <p:sp>
         <p:nvSpPr>
@@ -12414,6 +12693,13 @@
             <a:prstDash val="solid"/>
           </a:ln>
         </p:spPr>
+        <p:txBody>
+          <a:bodyPr/>
+          <a:lstStyle/>
+          <a:p>
+            <a:endParaRPr lang="en-US"/>
+          </a:p>
+        </p:txBody>
       </p:sp>
       <p:sp>
         <p:nvSpPr>
@@ -12436,7 +12722,7 @@
           <a:bodyPr wrap="square" lIns="0" tIns="0" rIns="0" bIns="0" rtlCol="0" anchor="ctr"/>
           <a:lstStyle/>
           <a:p>
-            <a:pPr algn="ctr" indent="0" marL="0">
+            <a:pPr marL="0" indent="0" algn="ctr">
               <a:buNone/>
             </a:pPr>
             <a:r>
@@ -12475,7 +12761,7 @@
           <a:bodyPr wrap="square" lIns="0" tIns="0" rIns="0" bIns="0" rtlCol="0" anchor="ctr"/>
           <a:lstStyle/>
           <a:p>
-            <a:pPr indent="0" marL="0">
+            <a:pPr marL="0" indent="0">
               <a:buNone/>
             </a:pPr>
             <a:r>
@@ -12514,7 +12800,7 @@
           <a:bodyPr wrap="square" lIns="0" tIns="0" rIns="0" bIns="0" rtlCol="0" anchor="ctr"/>
           <a:lstStyle/>
           <a:p>
-            <a:pPr indent="0" marL="0">
+            <a:pPr marL="0" indent="0">
               <a:buNone/>
             </a:pPr>
             <a:r>
@@ -12558,13 +12844,20 @@
             <a:prstDash val="solid"/>
           </a:ln>
           <a:effectLst>
-            <a:outerShdw sx="100000" sy="100000" kx="0" ky="0" algn="bl" rotWithShape="0" blurRad="88900" dist="38100" dir="5400000">
+            <a:outerShdw blurRad="88900" dist="38100" dir="5400000" algn="bl" rotWithShape="0">
               <a:srgbClr val="0F172A">
                 <a:alpha val="13000"/>
               </a:srgbClr>
             </a:outerShdw>
           </a:effectLst>
         </p:spPr>
+        <p:txBody>
+          <a:bodyPr/>
+          <a:lstStyle/>
+          <a:p>
+            <a:endParaRPr lang="en-US"/>
+          </a:p>
+        </p:txBody>
       </p:sp>
       <p:sp>
         <p:nvSpPr>
@@ -12590,6 +12883,13 @@
             <a:prstDash val="solid"/>
           </a:ln>
         </p:spPr>
+        <p:txBody>
+          <a:bodyPr/>
+          <a:lstStyle/>
+          <a:p>
+            <a:endParaRPr lang="en-US"/>
+          </a:p>
+        </p:txBody>
       </p:sp>
       <p:sp>
         <p:nvSpPr>
@@ -12612,7 +12912,7 @@
           <a:bodyPr wrap="square" lIns="0" tIns="0" rIns="0" bIns="0" rtlCol="0" anchor="ctr"/>
           <a:lstStyle/>
           <a:p>
-            <a:pPr algn="ctr" indent="0" marL="0">
+            <a:pPr marL="0" indent="0" algn="ctr">
               <a:buNone/>
             </a:pPr>
             <a:r>
@@ -12651,7 +12951,7 @@
           <a:bodyPr wrap="square" lIns="0" tIns="0" rIns="0" bIns="0" rtlCol="0" anchor="ctr"/>
           <a:lstStyle/>
           <a:p>
-            <a:pPr indent="0" marL="0">
+            <a:pPr marL="0" indent="0">
               <a:buNone/>
             </a:pPr>
             <a:r>
@@ -12690,7 +12990,7 @@
           <a:bodyPr wrap="square" lIns="0" tIns="0" rIns="0" bIns="0" rtlCol="0" anchor="ctr"/>
           <a:lstStyle/>
           <a:p>
-            <a:pPr indent="0" marL="0">
+            <a:pPr marL="0" indent="0">
               <a:buNone/>
             </a:pPr>
             <a:r>
@@ -12734,13 +13034,20 @@
             <a:prstDash val="solid"/>
           </a:ln>
           <a:effectLst>
-            <a:outerShdw sx="100000" sy="100000" kx="0" ky="0" algn="bl" rotWithShape="0" blurRad="88900" dist="38100" dir="5400000">
+            <a:outerShdw blurRad="88900" dist="38100" dir="5400000" algn="bl" rotWithShape="0">
               <a:srgbClr val="0F172A">
                 <a:alpha val="13000"/>
               </a:srgbClr>
             </a:outerShdw>
           </a:effectLst>
         </p:spPr>
+        <p:txBody>
+          <a:bodyPr/>
+          <a:lstStyle/>
+          <a:p>
+            <a:endParaRPr lang="en-US"/>
+          </a:p>
+        </p:txBody>
       </p:sp>
       <p:sp>
         <p:nvSpPr>
@@ -12766,6 +13073,13 @@
             <a:prstDash val="solid"/>
           </a:ln>
         </p:spPr>
+        <p:txBody>
+          <a:bodyPr/>
+          <a:lstStyle/>
+          <a:p>
+            <a:endParaRPr lang="en-US"/>
+          </a:p>
+        </p:txBody>
       </p:sp>
       <p:sp>
         <p:nvSpPr>
@@ -12788,7 +13102,7 @@
           <a:bodyPr wrap="square" lIns="0" tIns="0" rIns="0" bIns="0" rtlCol="0" anchor="ctr"/>
           <a:lstStyle/>
           <a:p>
-            <a:pPr algn="ctr" indent="0" marL="0">
+            <a:pPr marL="0" indent="0" algn="ctr">
               <a:buNone/>
             </a:pPr>
             <a:r>
@@ -12827,7 +13141,7 @@
           <a:bodyPr wrap="square" lIns="0" tIns="0" rIns="0" bIns="0" rtlCol="0" anchor="ctr"/>
           <a:lstStyle/>
           <a:p>
-            <a:pPr indent="0" marL="0">
+            <a:pPr marL="0" indent="0">
               <a:buNone/>
             </a:pPr>
             <a:r>
@@ -12866,7 +13180,7 @@
           <a:bodyPr wrap="square" lIns="0" tIns="0" rIns="0" bIns="0" rtlCol="0" anchor="ctr"/>
           <a:lstStyle/>
           <a:p>
-            <a:pPr indent="0" marL="0">
+            <a:pPr marL="0" indent="0">
               <a:buNone/>
             </a:pPr>
             <a:r>
@@ -12900,6 +13214,7 @@
         <a:solidFill>
           <a:srgbClr val="FFFFFF"/>
         </a:solidFill>
+        <a:effectLst/>
       </p:bgPr>
     </p:bg>
     <p:spTree>
@@ -12937,11 +13252,11 @@
           <a:bodyPr wrap="square" lIns="0" tIns="0" rIns="0" bIns="0" rtlCol="0" anchor="ctr"/>
           <a:lstStyle/>
           <a:p>
-            <a:pPr indent="0" marL="0">
-              <a:buNone/>
-            </a:pPr>
-            <a:r>
-              <a:rPr lang="en-US" sz="1200" b="1" spc="200" kern="0" dirty="0">
+            <a:pPr marL="0" indent="0">
+              <a:buNone/>
+            </a:pPr>
+            <a:r>
+              <a:rPr lang="en-US" sz="1200" b="1" kern="0" spc="200" dirty="0">
                 <a:solidFill>
                   <a:srgbClr val="0F766E"/>
                 </a:solidFill>
@@ -12976,7 +13291,7 @@
           <a:bodyPr wrap="square" lIns="0" tIns="0" rIns="0" bIns="0" rtlCol="0" anchor="ctr"/>
           <a:lstStyle/>
           <a:p>
-            <a:pPr indent="0" marL="0">
+            <a:pPr marL="0" indent="0">
               <a:buNone/>
             </a:pPr>
             <a:r>
@@ -13015,13 +13330,20 @@
           </a:solidFill>
           <a:ln/>
           <a:effectLst>
-            <a:outerShdw sx="100000" sy="100000" kx="0" ky="0" algn="bl" rotWithShape="0" blurRad="88900" dist="38100" dir="5400000">
+            <a:outerShdw blurRad="88900" dist="38100" dir="5400000" algn="bl" rotWithShape="0">
               <a:srgbClr val="0F172A">
                 <a:alpha val="13000"/>
               </a:srgbClr>
             </a:outerShdw>
           </a:effectLst>
         </p:spPr>
+        <p:txBody>
+          <a:bodyPr/>
+          <a:lstStyle/>
+          <a:p>
+            <a:endParaRPr lang="en-US"/>
+          </a:p>
+        </p:txBody>
       </p:sp>
       <p:sp>
         <p:nvSpPr>
@@ -13044,7 +13366,7 @@
           <a:bodyPr wrap="square" lIns="0" tIns="0" rIns="0" bIns="0" rtlCol="0" anchor="ctr"/>
           <a:lstStyle/>
           <a:p>
-            <a:pPr algn="ctr" indent="0" marL="0">
+            <a:pPr marL="0" indent="0" algn="ctr">
               <a:buNone/>
             </a:pPr>
             <a:r>
@@ -13083,7 +13405,7 @@
           <a:bodyPr wrap="square" lIns="0" tIns="0" rIns="0" bIns="0" rtlCol="0" anchor="ctr"/>
           <a:lstStyle/>
           <a:p>
-            <a:pPr algn="ctr" indent="0" marL="0">
+            <a:pPr marL="0" indent="0" algn="ctr">
               <a:lnSpc>
                 <a:spcPct val="105000"/>
               </a:lnSpc>
@@ -13103,7 +13425,7 @@
             <a:endParaRPr lang="en-US" sz="1150" dirty="0"/>
           </a:p>
           <a:p>
-            <a:pPr algn="ctr" indent="0" marL="0">
+            <a:pPr marL="0" indent="0" algn="ctr">
               <a:lnSpc>
                 <a:spcPct val="105000"/>
               </a:lnSpc>
@@ -13123,7 +13445,7 @@
             <a:endParaRPr lang="en-US" sz="1150" dirty="0"/>
           </a:p>
           <a:p>
-            <a:pPr algn="ctr" indent="0" marL="0">
+            <a:pPr marL="0" indent="0" algn="ctr">
               <a:lnSpc>
                 <a:spcPct val="105000"/>
               </a:lnSpc>
@@ -13143,7 +13465,7 @@
             <a:endParaRPr lang="en-US" sz="1150" dirty="0"/>
           </a:p>
           <a:p>
-            <a:pPr algn="ctr" indent="0" marL="0">
+            <a:pPr marL="0" indent="0" algn="ctr">
               <a:lnSpc>
                 <a:spcPct val="105000"/>
               </a:lnSpc>
@@ -13190,6 +13512,13 @@
             <a:prstDash val="solid"/>
           </a:ln>
         </p:spPr>
+        <p:txBody>
+          <a:bodyPr/>
+          <a:lstStyle/>
+          <a:p>
+            <a:endParaRPr lang="en-US"/>
+          </a:p>
+        </p:txBody>
       </p:sp>
       <p:sp>
         <p:nvSpPr>
@@ -13212,7 +13541,7 @@
           <a:bodyPr wrap="square" lIns="0" tIns="0" rIns="0" bIns="0" rtlCol="0" anchor="ctr"/>
           <a:lstStyle/>
           <a:p>
-            <a:pPr algn="ctr" indent="0" marL="0">
+            <a:pPr marL="0" indent="0" algn="ctr">
               <a:buNone/>
             </a:pPr>
             <a:r>
@@ -13256,6 +13585,13 @@
             <a:prstDash val="solid"/>
           </a:ln>
         </p:spPr>
+        <p:txBody>
+          <a:bodyPr/>
+          <a:lstStyle/>
+          <a:p>
+            <a:endParaRPr lang="en-US"/>
+          </a:p>
+        </p:txBody>
       </p:sp>
       <p:sp>
         <p:nvSpPr>
@@ -13278,7 +13614,7 @@
           <a:bodyPr wrap="square" lIns="0" tIns="0" rIns="0" bIns="0" rtlCol="0" anchor="ctr"/>
           <a:lstStyle/>
           <a:p>
-            <a:pPr algn="ctr" indent="0" marL="0">
+            <a:pPr marL="0" indent="0" algn="ctr">
               <a:buNone/>
             </a:pPr>
             <a:r>
@@ -13322,6 +13658,13 @@
             <a:prstDash val="solid"/>
           </a:ln>
         </p:spPr>
+        <p:txBody>
+          <a:bodyPr/>
+          <a:lstStyle/>
+          <a:p>
+            <a:endParaRPr lang="en-US"/>
+          </a:p>
+        </p:txBody>
       </p:sp>
       <p:sp>
         <p:nvSpPr>
@@ -13344,7 +13687,7 @@
           <a:bodyPr wrap="square" lIns="0" tIns="0" rIns="0" bIns="0" rtlCol="0" anchor="ctr"/>
           <a:lstStyle/>
           <a:p>
-            <a:pPr algn="ctr" indent="0" marL="0">
+            <a:pPr marL="0" indent="0" algn="ctr">
               <a:buNone/>
             </a:pPr>
             <a:r>
@@ -13388,6 +13731,13 @@
             <a:prstDash val="solid"/>
           </a:ln>
         </p:spPr>
+        <p:txBody>
+          <a:bodyPr/>
+          <a:lstStyle/>
+          <a:p>
+            <a:endParaRPr lang="en-US"/>
+          </a:p>
+        </p:txBody>
       </p:sp>
       <p:sp>
         <p:nvSpPr>
@@ -13410,7 +13760,7 @@
           <a:bodyPr wrap="square" lIns="0" tIns="0" rIns="0" bIns="0" rtlCol="0" anchor="ctr"/>
           <a:lstStyle/>
           <a:p>
-            <a:pPr algn="ctr" indent="0" marL="0">
+            <a:pPr marL="0" indent="0" algn="ctr">
               <a:buNone/>
             </a:pPr>
             <a:r>
@@ -13454,6 +13804,13 @@
             <a:prstDash val="solid"/>
           </a:ln>
         </p:spPr>
+        <p:txBody>
+          <a:bodyPr/>
+          <a:lstStyle/>
+          <a:p>
+            <a:endParaRPr lang="en-US"/>
+          </a:p>
+        </p:txBody>
       </p:sp>
       <p:sp>
         <p:nvSpPr>
@@ -13476,7 +13833,7 @@
           <a:bodyPr wrap="square" lIns="0" tIns="0" rIns="0" bIns="0" rtlCol="0" anchor="ctr"/>
           <a:lstStyle/>
           <a:p>
-            <a:pPr algn="ctr" indent="0" marL="0">
+            <a:pPr marL="0" indent="0" algn="ctr">
               <a:buNone/>
             </a:pPr>
             <a:r>
@@ -13520,6 +13877,13 @@
             <a:prstDash val="solid"/>
           </a:ln>
         </p:spPr>
+        <p:txBody>
+          <a:bodyPr/>
+          <a:lstStyle/>
+          <a:p>
+            <a:endParaRPr lang="en-US"/>
+          </a:p>
+        </p:txBody>
       </p:sp>
       <p:sp>
         <p:nvSpPr>
@@ -13542,7 +13906,7 @@
           <a:bodyPr wrap="square" lIns="0" tIns="0" rIns="0" bIns="0" rtlCol="0" anchor="ctr"/>
           <a:lstStyle/>
           <a:p>
-            <a:pPr algn="ctr" indent="0" marL="0">
+            <a:pPr marL="0" indent="0" algn="ctr">
               <a:buNone/>
             </a:pPr>
             <a:r>
@@ -13586,6 +13950,13 @@
             <a:prstDash val="solid"/>
           </a:ln>
         </p:spPr>
+        <p:txBody>
+          <a:bodyPr/>
+          <a:lstStyle/>
+          <a:p>
+            <a:endParaRPr lang="en-US"/>
+          </a:p>
+        </p:txBody>
       </p:sp>
       <p:sp>
         <p:nvSpPr>
@@ -13608,7 +13979,7 @@
           <a:bodyPr wrap="square" lIns="0" tIns="0" rIns="0" bIns="0" rtlCol="0" anchor="ctr"/>
           <a:lstStyle/>
           <a:p>
-            <a:pPr algn="ctr" indent="0" marL="0">
+            <a:pPr marL="0" indent="0" algn="ctr">
               <a:buNone/>
             </a:pPr>
             <a:r>
@@ -13647,7 +14018,7 @@
           <a:bodyPr wrap="square" lIns="0" tIns="0" rIns="0" bIns="0" rtlCol="0" anchor="ctr"/>
           <a:lstStyle/>
           <a:p>
-            <a:pPr algn="ctr" indent="0" marL="0">
+            <a:pPr marL="0" indent="0" algn="ctr">
               <a:buNone/>
             </a:pPr>
             <a:r>
@@ -13681,6 +14052,7 @@
         <a:solidFill>
           <a:srgbClr val="FFFFFF"/>
         </a:solidFill>
+        <a:effectLst/>
       </p:bgPr>
     </p:bg>
     <p:spTree>
@@ -13718,11 +14090,11 @@
           <a:bodyPr wrap="square" lIns="0" tIns="0" rIns="0" bIns="0" rtlCol="0" anchor="ctr"/>
           <a:lstStyle/>
           <a:p>
-            <a:pPr indent="0" marL="0">
-              <a:buNone/>
-            </a:pPr>
-            <a:r>
-              <a:rPr lang="en-US" sz="1200" b="1" spc="200" kern="0" dirty="0">
+            <a:pPr marL="0" indent="0">
+              <a:buNone/>
+            </a:pPr>
+            <a:r>
+              <a:rPr lang="en-US" sz="1200" b="1" kern="0" spc="200" dirty="0">
                 <a:solidFill>
                   <a:srgbClr val="0F766E"/>
                 </a:solidFill>
@@ -13757,7 +14129,7 @@
           <a:bodyPr wrap="square" lIns="0" tIns="0" rIns="0" bIns="0" rtlCol="0" anchor="ctr"/>
           <a:lstStyle/>
           <a:p>
-            <a:pPr indent="0" marL="0">
+            <a:pPr marL="0" indent="0">
               <a:buNone/>
             </a:pPr>
             <a:r>
@@ -13801,13 +14173,20 @@
             <a:prstDash val="solid"/>
           </a:ln>
           <a:effectLst>
-            <a:outerShdw sx="100000" sy="100000" kx="0" ky="0" algn="bl" rotWithShape="0" blurRad="88900" dist="38100" dir="5400000">
+            <a:outerShdw blurRad="88900" dist="38100" dir="5400000" algn="bl" rotWithShape="0">
               <a:srgbClr val="0F172A">
                 <a:alpha val="13000"/>
               </a:srgbClr>
             </a:outerShdw>
           </a:effectLst>
         </p:spPr>
+        <p:txBody>
+          <a:bodyPr/>
+          <a:lstStyle/>
+          <a:p>
+            <a:endParaRPr lang="en-US"/>
+          </a:p>
+        </p:txBody>
       </p:sp>
       <p:sp>
         <p:nvSpPr>
@@ -13830,7 +14209,7 @@
           <a:bodyPr wrap="square" lIns="0" tIns="0" rIns="0" bIns="0" rtlCol="0" anchor="ctr"/>
           <a:lstStyle/>
           <a:p>
-            <a:pPr indent="0" marL="0">
+            <a:pPr marL="0" indent="0">
               <a:buNone/>
             </a:pPr>
             <a:r>
@@ -13869,7 +14248,7 @@
           <a:bodyPr wrap="square" lIns="0" tIns="0" rIns="0" bIns="0" rtlCol="0" anchor="ctr"/>
           <a:lstStyle/>
           <a:p>
-            <a:pPr indent="0" marL="0">
+            <a:pPr marL="0" indent="0">
               <a:buNone/>
             </a:pPr>
             <a:r>
@@ -13908,7 +14287,7 @@
           <a:bodyPr wrap="square" lIns="0" tIns="0" rIns="0" bIns="0" rtlCol="0" anchor="ctr"/>
           <a:lstStyle/>
           <a:p>
-            <a:pPr algn="ctr" indent="0" marL="0">
+            <a:pPr marL="0" indent="0" algn="ctr">
               <a:buNone/>
             </a:pPr>
             <a:r>
@@ -13949,13 +14328,20 @@
             <a:prstDash val="solid"/>
           </a:ln>
           <a:effectLst>
-            <a:outerShdw sx="100000" sy="100000" kx="0" ky="0" algn="bl" rotWithShape="0" blurRad="88900" dist="38100" dir="5400000">
+            <a:outerShdw blurRad="88900" dist="38100" dir="5400000" algn="bl" rotWithShape="0">
               <a:srgbClr val="0F172A">
                 <a:alpha val="13000"/>
               </a:srgbClr>
             </a:outerShdw>
           </a:effectLst>
         </p:spPr>
+        <p:txBody>
+          <a:bodyPr/>
+          <a:lstStyle/>
+          <a:p>
+            <a:endParaRPr lang="en-US"/>
+          </a:p>
+        </p:txBody>
       </p:sp>
       <p:sp>
         <p:nvSpPr>
@@ -13978,7 +14364,7 @@
           <a:bodyPr wrap="square" lIns="0" tIns="0" rIns="0" bIns="0" rtlCol="0" anchor="ctr"/>
           <a:lstStyle/>
           <a:p>
-            <a:pPr indent="0" marL="0">
+            <a:pPr marL="0" indent="0">
               <a:buNone/>
             </a:pPr>
             <a:r>
@@ -14017,7 +14403,7 @@
           <a:bodyPr wrap="square" lIns="0" tIns="0" rIns="0" bIns="0" rtlCol="0" anchor="ctr"/>
           <a:lstStyle/>
           <a:p>
-            <a:pPr indent="0" marL="0">
+            <a:pPr marL="0" indent="0">
               <a:buNone/>
             </a:pPr>
             <a:r>
@@ -14056,7 +14442,7 @@
           <a:bodyPr wrap="square" lIns="0" tIns="0" rIns="0" bIns="0" rtlCol="0" anchor="ctr"/>
           <a:lstStyle/>
           <a:p>
-            <a:pPr algn="ctr" indent="0" marL="0">
+            <a:pPr marL="0" indent="0" algn="ctr">
               <a:buNone/>
             </a:pPr>
             <a:r>
@@ -14097,13 +14483,20 @@
             <a:prstDash val="solid"/>
           </a:ln>
           <a:effectLst>
-            <a:outerShdw sx="100000" sy="100000" kx="0" ky="0" algn="bl" rotWithShape="0" blurRad="88900" dist="38100" dir="5400000">
+            <a:outerShdw blurRad="88900" dist="38100" dir="5400000" algn="bl" rotWithShape="0">
               <a:srgbClr val="0F172A">
                 <a:alpha val="13000"/>
               </a:srgbClr>
             </a:outerShdw>
           </a:effectLst>
         </p:spPr>
+        <p:txBody>
+          <a:bodyPr/>
+          <a:lstStyle/>
+          <a:p>
+            <a:endParaRPr lang="en-US"/>
+          </a:p>
+        </p:txBody>
       </p:sp>
       <p:sp>
         <p:nvSpPr>
@@ -14126,7 +14519,7 @@
           <a:bodyPr wrap="square" lIns="0" tIns="0" rIns="0" bIns="0" rtlCol="0" anchor="ctr"/>
           <a:lstStyle/>
           <a:p>
-            <a:pPr indent="0" marL="0">
+            <a:pPr marL="0" indent="0">
               <a:buNone/>
             </a:pPr>
             <a:r>
@@ -14165,7 +14558,7 @@
           <a:bodyPr wrap="square" lIns="0" tIns="0" rIns="0" bIns="0" rtlCol="0" anchor="ctr"/>
           <a:lstStyle/>
           <a:p>
-            <a:pPr indent="0" marL="0">
+            <a:pPr marL="0" indent="0">
               <a:buNone/>
             </a:pPr>
             <a:r>
@@ -14199,6 +14592,7 @@
         <a:solidFill>
           <a:srgbClr val="FFFFFF"/>
         </a:solidFill>
+        <a:effectLst/>
       </p:bgPr>
     </p:bg>
     <p:spTree>
@@ -14236,11 +14630,11 @@
           <a:bodyPr wrap="square" lIns="0" tIns="0" rIns="0" bIns="0" rtlCol="0" anchor="ctr"/>
           <a:lstStyle/>
           <a:p>
-            <a:pPr indent="0" marL="0">
-              <a:buNone/>
-            </a:pPr>
-            <a:r>
-              <a:rPr lang="en-US" sz="1200" b="1" spc="200" kern="0" dirty="0">
+            <a:pPr marL="0" indent="0">
+              <a:buNone/>
+            </a:pPr>
+            <a:r>
+              <a:rPr lang="en-US" sz="1200" b="1" kern="0" spc="200" dirty="0">
                 <a:solidFill>
                   <a:srgbClr val="0F766E"/>
                 </a:solidFill>
@@ -14275,7 +14669,7 @@
           <a:bodyPr wrap="square" lIns="0" tIns="0" rIns="0" bIns="0" rtlCol="0" anchor="ctr"/>
           <a:lstStyle/>
           <a:p>
-            <a:pPr indent="0" marL="0">
+            <a:pPr marL="0" indent="0">
               <a:buNone/>
             </a:pPr>
             <a:r>
@@ -14319,6 +14713,13 @@
             <a:prstDash val="solid"/>
           </a:ln>
         </p:spPr>
+        <p:txBody>
+          <a:bodyPr/>
+          <a:lstStyle/>
+          <a:p>
+            <a:endParaRPr lang="en-US"/>
+          </a:p>
+        </p:txBody>
       </p:sp>
       <p:sp>
         <p:nvSpPr>
@@ -14341,7 +14742,7 @@
           <a:bodyPr wrap="square" lIns="0" tIns="0" rIns="0" bIns="0" rtlCol="0" anchor="ctr"/>
           <a:lstStyle/>
           <a:p>
-            <a:pPr indent="0" marL="0">
+            <a:pPr marL="0" indent="0">
               <a:buNone/>
             </a:pPr>
             <a:r>
@@ -14358,7 +14759,7 @@
             <a:endParaRPr lang="en-US" sz="1200" dirty="0"/>
           </a:p>
           <a:p>
-            <a:pPr indent="0" marL="0">
+            <a:pPr marL="0" indent="0">
               <a:buNone/>
             </a:pPr>
             <a:r>
@@ -14397,7 +14798,7 @@
           <a:bodyPr wrap="square" lIns="0" tIns="0" rIns="0" bIns="0" rtlCol="0" anchor="ctr"/>
           <a:lstStyle/>
           <a:p>
-            <a:pPr algn="ctr" indent="0" marL="0">
+            <a:pPr marL="0" indent="0" algn="ctr">
               <a:buNone/>
             </a:pPr>
             <a:r>
@@ -14438,6 +14839,13 @@
             <a:prstDash val="solid"/>
           </a:ln>
         </p:spPr>
+        <p:txBody>
+          <a:bodyPr/>
+          <a:lstStyle/>
+          <a:p>
+            <a:endParaRPr lang="en-US"/>
+          </a:p>
+        </p:txBody>
       </p:sp>
       <p:sp>
         <p:nvSpPr>
@@ -14460,7 +14868,7 @@
           <a:bodyPr wrap="square" lIns="0" tIns="0" rIns="0" bIns="0" rtlCol="0" anchor="ctr"/>
           <a:lstStyle/>
           <a:p>
-            <a:pPr indent="0" marL="0">
+            <a:pPr marL="0" indent="0">
               <a:buNone/>
             </a:pPr>
             <a:r>
@@ -14477,7 +14885,7 @@
             <a:endParaRPr lang="en-US" sz="1200" dirty="0"/>
           </a:p>
           <a:p>
-            <a:pPr indent="0" marL="0">
+            <a:pPr marL="0" indent="0">
               <a:buNone/>
             </a:pPr>
             <a:r>
@@ -14516,7 +14924,7 @@
           <a:bodyPr wrap="square" lIns="0" tIns="0" rIns="0" bIns="0" rtlCol="0" anchor="ctr"/>
           <a:lstStyle/>
           <a:p>
-            <a:pPr algn="ctr" indent="0" marL="0">
+            <a:pPr marL="0" indent="0" algn="ctr">
               <a:buNone/>
             </a:pPr>
             <a:r>
@@ -14557,6 +14965,13 @@
             <a:prstDash val="solid"/>
           </a:ln>
         </p:spPr>
+        <p:txBody>
+          <a:bodyPr/>
+          <a:lstStyle/>
+          <a:p>
+            <a:endParaRPr lang="en-US"/>
+          </a:p>
+        </p:txBody>
       </p:sp>
       <p:sp>
         <p:nvSpPr>
@@ -14579,7 +14994,7 @@
           <a:bodyPr wrap="square" lIns="0" tIns="0" rIns="0" bIns="0" rtlCol="0" anchor="ctr"/>
           <a:lstStyle/>
           <a:p>
-            <a:pPr indent="0" marL="0">
+            <a:pPr marL="0" indent="0">
               <a:buNone/>
             </a:pPr>
             <a:r>
@@ -14596,7 +15011,7 @@
             <a:endParaRPr lang="en-US" sz="1200" dirty="0"/>
           </a:p>
           <a:p>
-            <a:pPr indent="0" marL="0">
+            <a:pPr marL="0" indent="0">
               <a:buNone/>
             </a:pPr>
             <a:r>
@@ -14635,7 +15050,7 @@
           <a:bodyPr wrap="square" lIns="0" tIns="0" rIns="0" bIns="0" rtlCol="0" anchor="ctr"/>
           <a:lstStyle/>
           <a:p>
-            <a:pPr algn="ctr" indent="0" marL="0">
+            <a:pPr marL="0" indent="0" algn="ctr">
               <a:buNone/>
             </a:pPr>
             <a:r>
@@ -14676,6 +15091,13 @@
             <a:prstDash val="solid"/>
           </a:ln>
         </p:spPr>
+        <p:txBody>
+          <a:bodyPr/>
+          <a:lstStyle/>
+          <a:p>
+            <a:endParaRPr lang="en-US"/>
+          </a:p>
+        </p:txBody>
       </p:sp>
       <p:sp>
         <p:nvSpPr>
@@ -14698,7 +15120,7 @@
           <a:bodyPr wrap="square" lIns="0" tIns="0" rIns="0" bIns="0" rtlCol="0" anchor="ctr"/>
           <a:lstStyle/>
           <a:p>
-            <a:pPr indent="0" marL="0">
+            <a:pPr marL="0" indent="0">
               <a:buNone/>
             </a:pPr>
             <a:r>
@@ -14737,7 +15159,7 @@
           <a:bodyPr wrap="square" lIns="0" tIns="0" rIns="0" bIns="0" rtlCol="0" anchor="ctr"/>
           <a:lstStyle/>
           <a:p>
-            <a:pPr algn="ctr" indent="0" marL="0">
+            <a:pPr marL="0" indent="0" algn="ctr">
               <a:buNone/>
             </a:pPr>
             <a:r>
@@ -14778,6 +15200,13 @@
             <a:prstDash val="solid"/>
           </a:ln>
         </p:spPr>
+        <p:txBody>
+          <a:bodyPr/>
+          <a:lstStyle/>
+          <a:p>
+            <a:endParaRPr lang="en-US"/>
+          </a:p>
+        </p:txBody>
       </p:sp>
       <p:sp>
         <p:nvSpPr>
@@ -14800,7 +15229,7 @@
           <a:bodyPr wrap="square" lIns="0" tIns="0" rIns="0" bIns="0" rtlCol="0" anchor="ctr"/>
           <a:lstStyle/>
           <a:p>
-            <a:pPr indent="0" marL="0">
+            <a:pPr marL="0" indent="0">
               <a:buNone/>
             </a:pPr>
             <a:r>
@@ -14817,7 +15246,7 @@
             <a:endParaRPr lang="en-US" sz="1200" dirty="0"/>
           </a:p>
           <a:p>
-            <a:pPr indent="0" marL="0">
+            <a:pPr marL="0" indent="0">
               <a:buNone/>
             </a:pPr>
             <a:r>
@@ -14861,13 +15290,20 @@
             <a:prstDash val="solid"/>
           </a:ln>
           <a:effectLst>
-            <a:outerShdw sx="100000" sy="100000" kx="0" ky="0" algn="bl" rotWithShape="0" blurRad="88900" dist="38100" dir="5400000">
+            <a:outerShdw blurRad="88900" dist="38100" dir="5400000" algn="bl" rotWithShape="0">
               <a:srgbClr val="0F172A">
                 <a:alpha val="13000"/>
               </a:srgbClr>
             </a:outerShdw>
           </a:effectLst>
         </p:spPr>
+        <p:txBody>
+          <a:bodyPr/>
+          <a:lstStyle/>
+          <a:p>
+            <a:endParaRPr lang="en-US"/>
+          </a:p>
+        </p:txBody>
       </p:sp>
       <p:sp>
         <p:nvSpPr>
@@ -14890,7 +15326,7 @@
           <a:bodyPr wrap="square" lIns="0" tIns="0" rIns="0" bIns="0" rtlCol="0" anchor="ctr"/>
           <a:lstStyle/>
           <a:p>
-            <a:pPr algn="ctr" indent="0" marL="0">
+            <a:pPr marL="0" indent="0" algn="ctr">
               <a:buNone/>
             </a:pPr>
             <a:r>
@@ -14929,7 +15365,7 @@
           <a:bodyPr wrap="square" lIns="0" tIns="0" rIns="0" bIns="0" rtlCol="0" anchor="ctr"/>
           <a:lstStyle/>
           <a:p>
-            <a:pPr algn="ctr" indent="0" marL="0">
+            <a:pPr marL="0" indent="0" algn="ctr">
               <a:buNone/>
             </a:pPr>
             <a:r>
@@ -15248,4 +15684,319 @@
     </a:ext>
   </a:extLst>
 </a:theme>
+</file>
+
+<file path=ppt/theme/theme2.xml><?xml version="1.0" encoding="utf-8"?>
+<a:theme xmlns:a="http://schemas.openxmlformats.org/drawingml/2006/main" name="Office Theme">
+  <a:themeElements>
+    <a:clrScheme name="Office">
+      <a:dk1>
+        <a:sysClr val="windowText" lastClr="000000"/>
+      </a:dk1>
+      <a:lt1>
+        <a:sysClr val="window" lastClr="FFFFFF"/>
+      </a:lt1>
+      <a:dk2>
+        <a:srgbClr val="0E2841"/>
+      </a:dk2>
+      <a:lt2>
+        <a:srgbClr val="E8E8E8"/>
+      </a:lt2>
+      <a:accent1>
+        <a:srgbClr val="156082"/>
+      </a:accent1>
+      <a:accent2>
+        <a:srgbClr val="E97132"/>
+      </a:accent2>
+      <a:accent3>
+        <a:srgbClr val="196B24"/>
+      </a:accent3>
+      <a:accent4>
+        <a:srgbClr val="0F9ED5"/>
+      </a:accent4>
+      <a:accent5>
+        <a:srgbClr val="A02B93"/>
+      </a:accent5>
+      <a:accent6>
+        <a:srgbClr val="4EA72E"/>
+      </a:accent6>
+      <a:hlink>
+        <a:srgbClr val="467886"/>
+      </a:hlink>
+      <a:folHlink>
+        <a:srgbClr val="96607D"/>
+      </a:folHlink>
+    </a:clrScheme>
+    <a:fontScheme name="Office">
+      <a:majorFont>
+        <a:latin typeface="Aptos Display" panose="02110004020202020204"/>
+        <a:ea typeface=""/>
+        <a:cs typeface=""/>
+        <a:font script="Jpan" typeface="游ゴシック Light"/>
+        <a:font script="Hang" typeface="맑은 고딕"/>
+        <a:font script="Hans" typeface="等线 Light"/>
+        <a:font script="Hant" typeface="新細明體"/>
+        <a:font script="Arab" typeface="Times New Roman"/>
+        <a:font script="Hebr" typeface="Times New Roman"/>
+        <a:font script="Thai" typeface="Angsana New"/>
+        <a:font script="Ethi" typeface="Nyala"/>
+        <a:font script="Beng" typeface="Vrinda"/>
+        <a:font script="Gujr" typeface="Shruti"/>
+        <a:font script="Khmr" typeface="MoolBoran"/>
+        <a:font script="Knda" typeface="Tunga"/>
+        <a:font script="Guru" typeface="Raavi"/>
+        <a:font script="Cans" typeface="Euphemia"/>
+        <a:font script="Cher" typeface="Plantagenet Cherokee"/>
+        <a:font script="Yiii" typeface="Microsoft Yi Baiti"/>
+        <a:font script="Tibt" typeface="Microsoft Himalaya"/>
+        <a:font script="Thaa" typeface="MV Boli"/>
+        <a:font script="Deva" typeface="Mangal"/>
+        <a:font script="Telu" typeface="Gautami"/>
+        <a:font script="Taml" typeface="Latha"/>
+        <a:font script="Syrc" typeface="Estrangelo Edessa"/>
+        <a:font script="Orya" typeface="Kalinga"/>
+        <a:font script="Mlym" typeface="Kartika"/>
+        <a:font script="Laoo" typeface="DokChampa"/>
+        <a:font script="Sinh" typeface="Iskoola Pota"/>
+        <a:font script="Mong" typeface="Mongolian Baiti"/>
+        <a:font script="Viet" typeface="Times New Roman"/>
+        <a:font script="Uigh" typeface="Microsoft Uighur"/>
+        <a:font script="Geor" typeface="Sylfaen"/>
+        <a:font script="Armn" typeface="Arial"/>
+        <a:font script="Bugi" typeface="Leelawadee UI"/>
+        <a:font script="Bopo" typeface="Microsoft JhengHei"/>
+        <a:font script="Java" typeface="Javanese Text"/>
+        <a:font script="Lisu" typeface="Segoe UI"/>
+        <a:font script="Mymr" typeface="Myanmar Text"/>
+        <a:font script="Nkoo" typeface="Ebrima"/>
+        <a:font script="Olck" typeface="Nirmala UI"/>
+        <a:font script="Osma" typeface="Ebrima"/>
+        <a:font script="Phag" typeface="Phagspa"/>
+        <a:font script="Syrn" typeface="Estrangelo Edessa"/>
+        <a:font script="Syrj" typeface="Estrangelo Edessa"/>
+        <a:font script="Syre" typeface="Estrangelo Edessa"/>
+        <a:font script="Sora" typeface="Nirmala UI"/>
+        <a:font script="Tale" typeface="Microsoft Tai Le"/>
+        <a:font script="Talu" typeface="Microsoft New Tai Lue"/>
+        <a:font script="Tfng" typeface="Ebrima"/>
+      </a:majorFont>
+      <a:minorFont>
+        <a:latin typeface="Aptos" panose="02110004020202020204"/>
+        <a:ea typeface=""/>
+        <a:cs typeface=""/>
+        <a:font script="Jpan" typeface="游ゴシック"/>
+        <a:font script="Hang" typeface="맑은 고딕"/>
+        <a:font script="Hans" typeface="等线"/>
+        <a:font script="Hant" typeface="新細明體"/>
+        <a:font script="Arab" typeface="Arial"/>
+        <a:font script="Hebr" typeface="Arial"/>
+        <a:font script="Thai" typeface="Cordia New"/>
+        <a:font script="Ethi" typeface="Nyala"/>
+        <a:font script="Beng" typeface="Vrinda"/>
+        <a:font script="Gujr" typeface="Shruti"/>
+        <a:font script="Khmr" typeface="DaunPenh"/>
+        <a:font script="Knda" typeface="Tunga"/>
+        <a:font script="Guru" typeface="Raavi"/>
+        <a:font script="Cans" typeface="Euphemia"/>
+        <a:font script="Cher" typeface="Plantagenet Cherokee"/>
+        <a:font script="Yiii" typeface="Microsoft Yi Baiti"/>
+        <a:font script="Tibt" typeface="Microsoft Himalaya"/>
+        <a:font script="Thaa" typeface="MV Boli"/>
+        <a:font script="Deva" typeface="Mangal"/>
+        <a:font script="Telu" typeface="Gautami"/>
+        <a:font script="Taml" typeface="Latha"/>
+        <a:font script="Syrc" typeface="Estrangelo Edessa"/>
+        <a:font script="Orya" typeface="Kalinga"/>
+        <a:font script="Mlym" typeface="Kartika"/>
+        <a:font script="Laoo" typeface="DokChampa"/>
+        <a:font script="Sinh" typeface="Iskoola Pota"/>
+        <a:font script="Mong" typeface="Mongolian Baiti"/>
+        <a:font script="Viet" typeface="Arial"/>
+        <a:font script="Uigh" typeface="Microsoft Uighur"/>
+        <a:font script="Geor" typeface="Sylfaen"/>
+        <a:font script="Armn" typeface="Arial"/>
+        <a:font script="Bugi" typeface="Leelawadee UI"/>
+        <a:font script="Bopo" typeface="Microsoft JhengHei"/>
+        <a:font script="Java" typeface="Javanese Text"/>
+        <a:font script="Lisu" typeface="Segoe UI"/>
+        <a:font script="Mymr" typeface="Myanmar Text"/>
+        <a:font script="Nkoo" typeface="Ebrima"/>
+        <a:font script="Olck" typeface="Nirmala UI"/>
+        <a:font script="Osma" typeface="Ebrima"/>
+        <a:font script="Phag" typeface="Phagspa"/>
+        <a:font script="Syrn" typeface="Estrangelo Edessa"/>
+        <a:font script="Syrj" typeface="Estrangelo Edessa"/>
+        <a:font script="Syre" typeface="Estrangelo Edessa"/>
+        <a:font script="Sora" typeface="Nirmala UI"/>
+        <a:font script="Tale" typeface="Microsoft Tai Le"/>
+        <a:font script="Talu" typeface="Microsoft New Tai Lue"/>
+        <a:font script="Tfng" typeface="Ebrima"/>
+      </a:minorFont>
+    </a:fontScheme>
+    <a:fmtScheme name="Office">
+      <a:fillStyleLst>
+        <a:solidFill>
+          <a:schemeClr val="phClr"/>
+        </a:solidFill>
+        <a:gradFill rotWithShape="1">
+          <a:gsLst>
+            <a:gs pos="0">
+              <a:schemeClr val="phClr">
+                <a:lumMod val="110000"/>
+                <a:satMod val="105000"/>
+                <a:tint val="67000"/>
+              </a:schemeClr>
+            </a:gs>
+            <a:gs pos="50000">
+              <a:schemeClr val="phClr">
+                <a:lumMod val="105000"/>
+                <a:satMod val="103000"/>
+                <a:tint val="73000"/>
+              </a:schemeClr>
+            </a:gs>
+            <a:gs pos="100000">
+              <a:schemeClr val="phClr">
+                <a:lumMod val="105000"/>
+                <a:satMod val="109000"/>
+                <a:tint val="81000"/>
+              </a:schemeClr>
+            </a:gs>
+          </a:gsLst>
+          <a:lin ang="5400000" scaled="0"/>
+        </a:gradFill>
+        <a:gradFill rotWithShape="1">
+          <a:gsLst>
+            <a:gs pos="0">
+              <a:schemeClr val="phClr">
+                <a:satMod val="103000"/>
+                <a:lumMod val="102000"/>
+                <a:tint val="94000"/>
+              </a:schemeClr>
+            </a:gs>
+            <a:gs pos="50000">
+              <a:schemeClr val="phClr">
+                <a:satMod val="110000"/>
+                <a:lumMod val="100000"/>
+                <a:shade val="100000"/>
+              </a:schemeClr>
+            </a:gs>
+            <a:gs pos="100000">
+              <a:schemeClr val="phClr">
+                <a:lumMod val="99000"/>
+                <a:satMod val="120000"/>
+                <a:shade val="78000"/>
+              </a:schemeClr>
+            </a:gs>
+          </a:gsLst>
+          <a:lin ang="5400000" scaled="0"/>
+        </a:gradFill>
+      </a:fillStyleLst>
+      <a:lnStyleLst>
+        <a:ln w="12700" cap="flat" cmpd="sng" algn="ctr">
+          <a:solidFill>
+            <a:schemeClr val="phClr"/>
+          </a:solidFill>
+          <a:prstDash val="solid"/>
+          <a:miter lim="800000"/>
+        </a:ln>
+        <a:ln w="19050" cap="flat" cmpd="sng" algn="ctr">
+          <a:solidFill>
+            <a:schemeClr val="phClr"/>
+          </a:solidFill>
+          <a:prstDash val="solid"/>
+          <a:miter lim="800000"/>
+        </a:ln>
+        <a:ln w="25400" cap="flat" cmpd="sng" algn="ctr">
+          <a:solidFill>
+            <a:schemeClr val="phClr"/>
+          </a:solidFill>
+          <a:prstDash val="solid"/>
+          <a:miter lim="800000"/>
+        </a:ln>
+      </a:lnStyleLst>
+      <a:effectStyleLst>
+        <a:effectStyle>
+          <a:effectLst/>
+        </a:effectStyle>
+        <a:effectStyle>
+          <a:effectLst/>
+        </a:effectStyle>
+        <a:effectStyle>
+          <a:effectLst>
+            <a:outerShdw blurRad="57150" dist="19050" dir="5400000" algn="ctr" rotWithShape="0">
+              <a:srgbClr val="000000">
+                <a:alpha val="63000"/>
+              </a:srgbClr>
+            </a:outerShdw>
+          </a:effectLst>
+        </a:effectStyle>
+      </a:effectStyleLst>
+      <a:bgFillStyleLst>
+        <a:solidFill>
+          <a:schemeClr val="phClr"/>
+        </a:solidFill>
+        <a:solidFill>
+          <a:schemeClr val="phClr">
+            <a:tint val="95000"/>
+            <a:satMod val="170000"/>
+          </a:schemeClr>
+        </a:solidFill>
+        <a:gradFill rotWithShape="1">
+          <a:gsLst>
+            <a:gs pos="0">
+              <a:schemeClr val="phClr">
+                <a:tint val="93000"/>
+                <a:satMod val="150000"/>
+                <a:shade val="98000"/>
+                <a:lumMod val="102000"/>
+              </a:schemeClr>
+            </a:gs>
+            <a:gs pos="50000">
+              <a:schemeClr val="phClr">
+                <a:tint val="98000"/>
+                <a:satMod val="130000"/>
+                <a:shade val="90000"/>
+                <a:lumMod val="103000"/>
+              </a:schemeClr>
+            </a:gs>
+            <a:gs pos="100000">
+              <a:schemeClr val="phClr">
+                <a:shade val="63000"/>
+                <a:satMod val="120000"/>
+              </a:schemeClr>
+            </a:gs>
+          </a:gsLst>
+          <a:lin ang="5400000" scaled="0"/>
+        </a:gradFill>
+      </a:bgFillStyleLst>
+    </a:fmtScheme>
+  </a:themeElements>
+  <a:objectDefaults>
+    <a:lnDef>
+      <a:spPr/>
+      <a:bodyPr/>
+      <a:lstStyle/>
+      <a:style>
+        <a:lnRef idx="2">
+          <a:schemeClr val="accent1"/>
+        </a:lnRef>
+        <a:fillRef idx="0">
+          <a:schemeClr val="accent1"/>
+        </a:fillRef>
+        <a:effectRef idx="1">
+          <a:schemeClr val="accent1"/>
+        </a:effectRef>
+        <a:fontRef idx="minor">
+          <a:schemeClr val="tx1"/>
+        </a:fontRef>
+      </a:style>
+    </a:lnDef>
+  </a:objectDefaults>
+  <a:extraClrSchemeLst/>
+  <a:extLst>
+    <a:ext uri="{05A4C25C-085E-4340-85A3-A5531E510DB2}">
+      <thm15:themeFamily xmlns:thm15="http://schemas.microsoft.com/office/thememl/2012/main" name="Office Theme" id="{2E142A2C-CD16-42D6-873A-C26D2A0506FA}" vid="{1BDDFF52-6CD6-40A5-AB3C-68EB2F1E4D0A}"/>
+    </a:ext>
+  </a:extLst>
+</a:theme>
 </file>